--- a/SewerEscape企画書.pptx
+++ b/SewerEscape企画書.pptx
@@ -7,6 +7,8 @@
   <p:sldIdLst>
     <p:sldId id="256" r:id="rId2"/>
     <p:sldId id="257" r:id="rId3"/>
+    <p:sldId id="258" r:id="rId4"/>
+    <p:sldId id="259" r:id="rId5"/>
   </p:sldIdLst>
   <p:sldSz cx="12192000" cy="6858000"/>
   <p:notesSz cx="6858000" cy="9144000"/>
@@ -105,6 +107,11 @@
       </a:defRPr>
     </a:lvl9pPr>
   </p:defaultTextStyle>
+  <p:extLst>
+    <p:ext uri="{EFAFB233-063F-42B5-8137-9DF3F51BA10A}">
+      <p15:sldGuideLst xmlns:p15="http://schemas.microsoft.com/office/powerpoint/2012/main"/>
+    </p:ext>
+  </p:extLst>
 </p:presentation>
 </file>
 
@@ -255,7 +262,7 @@
           <a:p>
             <a:fld id="{2E7489E2-24D5-4E87-8DBE-89F167604D51}" type="datetimeFigureOut">
               <a:rPr kumimoji="1" lang="ja-JP" altLang="en-US" smtClean="0"/>
-              <a:t>2026/9/10</a:t>
+              <a:t>2026/9/15</a:t>
             </a:fld>
             <a:endParaRPr kumimoji="1" lang="ja-JP" altLang="en-US"/>
           </a:p>
@@ -485,7 +492,7 @@
           <a:p>
             <a:fld id="{2E7489E2-24D5-4E87-8DBE-89F167604D51}" type="datetimeFigureOut">
               <a:rPr kumimoji="1" lang="ja-JP" altLang="en-US" smtClean="0"/>
-              <a:t>2026/9/10</a:t>
+              <a:t>2026/9/15</a:t>
             </a:fld>
             <a:endParaRPr kumimoji="1" lang="ja-JP" altLang="en-US"/>
           </a:p>
@@ -725,7 +732,7 @@
           <a:p>
             <a:fld id="{2E7489E2-24D5-4E87-8DBE-89F167604D51}" type="datetimeFigureOut">
               <a:rPr kumimoji="1" lang="ja-JP" altLang="en-US" smtClean="0"/>
-              <a:t>2026/9/10</a:t>
+              <a:t>2026/9/15</a:t>
             </a:fld>
             <a:endParaRPr kumimoji="1" lang="ja-JP" altLang="en-US"/>
           </a:p>
@@ -955,7 +962,7 @@
           <a:p>
             <a:fld id="{2E7489E2-24D5-4E87-8DBE-89F167604D51}" type="datetimeFigureOut">
               <a:rPr kumimoji="1" lang="ja-JP" altLang="en-US" smtClean="0"/>
-              <a:t>2026/9/10</a:t>
+              <a:t>2026/9/15</a:t>
             </a:fld>
             <a:endParaRPr kumimoji="1" lang="ja-JP" altLang="en-US"/>
           </a:p>
@@ -1230,7 +1237,7 @@
           <a:p>
             <a:fld id="{2E7489E2-24D5-4E87-8DBE-89F167604D51}" type="datetimeFigureOut">
               <a:rPr kumimoji="1" lang="ja-JP" altLang="en-US" smtClean="0"/>
-              <a:t>2026/9/10</a:t>
+              <a:t>2026/9/15</a:t>
             </a:fld>
             <a:endParaRPr kumimoji="1" lang="ja-JP" altLang="en-US"/>
           </a:p>
@@ -1559,7 +1566,7 @@
           <a:p>
             <a:fld id="{2E7489E2-24D5-4E87-8DBE-89F167604D51}" type="datetimeFigureOut">
               <a:rPr kumimoji="1" lang="ja-JP" altLang="en-US" smtClean="0"/>
-              <a:t>2026/9/10</a:t>
+              <a:t>2026/9/15</a:t>
             </a:fld>
             <a:endParaRPr kumimoji="1" lang="ja-JP" altLang="en-US"/>
           </a:p>
@@ -2035,7 +2042,7 @@
           <a:p>
             <a:fld id="{2E7489E2-24D5-4E87-8DBE-89F167604D51}" type="datetimeFigureOut">
               <a:rPr kumimoji="1" lang="ja-JP" altLang="en-US" smtClean="0"/>
-              <a:t>2026/9/10</a:t>
+              <a:t>2026/9/15</a:t>
             </a:fld>
             <a:endParaRPr kumimoji="1" lang="ja-JP" altLang="en-US"/>
           </a:p>
@@ -2176,7 +2183,7 @@
           <a:p>
             <a:fld id="{2E7489E2-24D5-4E87-8DBE-89F167604D51}" type="datetimeFigureOut">
               <a:rPr kumimoji="1" lang="ja-JP" altLang="en-US" smtClean="0"/>
-              <a:t>2026/9/10</a:t>
+              <a:t>2026/9/15</a:t>
             </a:fld>
             <a:endParaRPr kumimoji="1" lang="ja-JP" altLang="en-US"/>
           </a:p>
@@ -2289,7 +2296,7 @@
           <a:p>
             <a:fld id="{2E7489E2-24D5-4E87-8DBE-89F167604D51}" type="datetimeFigureOut">
               <a:rPr kumimoji="1" lang="ja-JP" altLang="en-US" smtClean="0"/>
-              <a:t>2026/9/10</a:t>
+              <a:t>2026/9/15</a:t>
             </a:fld>
             <a:endParaRPr kumimoji="1" lang="ja-JP" altLang="en-US"/>
           </a:p>
@@ -2632,7 +2639,7 @@
           <a:p>
             <a:fld id="{2E7489E2-24D5-4E87-8DBE-89F167604D51}" type="datetimeFigureOut">
               <a:rPr kumimoji="1" lang="ja-JP" altLang="en-US" smtClean="0"/>
-              <a:t>2026/9/10</a:t>
+              <a:t>2026/9/15</a:t>
             </a:fld>
             <a:endParaRPr kumimoji="1" lang="ja-JP" altLang="en-US"/>
           </a:p>
@@ -2920,7 +2927,7 @@
           <a:p>
             <a:fld id="{2E7489E2-24D5-4E87-8DBE-89F167604D51}" type="datetimeFigureOut">
               <a:rPr kumimoji="1" lang="ja-JP" altLang="en-US" smtClean="0"/>
-              <a:t>2026/9/10</a:t>
+              <a:t>2026/9/15</a:t>
             </a:fld>
             <a:endParaRPr kumimoji="1" lang="ja-JP" altLang="en-US"/>
           </a:p>
@@ -3193,7 +3200,7 @@
           <a:p>
             <a:fld id="{2E7489E2-24D5-4E87-8DBE-89F167604D51}" type="datetimeFigureOut">
               <a:rPr kumimoji="1" lang="ja-JP" altLang="en-US" smtClean="0"/>
-              <a:t>2026/9/10</a:t>
+              <a:t>2026/9/15</a:t>
             </a:fld>
             <a:endParaRPr kumimoji="1" lang="ja-JP" altLang="en-US"/>
           </a:p>
@@ -3628,8 +3635,8 @@
         </p:nvSpPr>
         <p:spPr>
           <a:xfrm>
-            <a:off x="309418" y="127001"/>
-            <a:ext cx="10002982" cy="935182"/>
+            <a:off x="255987" y="482025"/>
+            <a:ext cx="10056413" cy="775856"/>
           </a:xfrm>
         </p:spPr>
         <p:txBody>
@@ -3667,8 +3674,8 @@
         </p:nvSpPr>
         <p:spPr>
           <a:xfrm>
-            <a:off x="255987" y="1062182"/>
-            <a:ext cx="9793177" cy="4932217"/>
+            <a:off x="263907" y="2065909"/>
+            <a:ext cx="5028529" cy="1286891"/>
           </a:xfrm>
         </p:spPr>
         <p:txBody>
@@ -3676,6 +3683,36 @@
             <a:normAutofit/>
           </a:bodyPr>
           <a:lstStyle/>
+          <a:p>
+            <a:pPr algn="l"/>
+            <a:r>
+              <a:rPr lang="ja-JP" altLang="en-US" sz="3600" b="1" dirty="0"/>
+              <a:t>プラットフォーム</a:t>
+            </a:r>
+            <a:r>
+              <a:rPr lang="ja-JP" altLang="en-US" sz="3600" dirty="0"/>
+              <a:t>：</a:t>
+            </a:r>
+            <a:r>
+              <a:rPr lang="en-US" altLang="ja-JP" sz="3600" dirty="0"/>
+              <a:t>PC</a:t>
+            </a:r>
+          </a:p>
+          <a:p>
+            <a:pPr algn="l"/>
+            <a:r>
+              <a:rPr lang="ja-JP" altLang="en-US" sz="3600" b="1" dirty="0"/>
+              <a:t>使用エンジン：</a:t>
+            </a:r>
+            <a:r>
+              <a:rPr lang="en-US" altLang="ja-JP" sz="3600" dirty="0"/>
+              <a:t>Unity</a:t>
+            </a:r>
+          </a:p>
+          <a:p>
+            <a:pPr algn="l"/>
+            <a:endParaRPr lang="en-US" altLang="ja-JP" sz="3600" dirty="0"/>
+          </a:p>
           <a:p>
             <a:pPr algn="l"/>
             <a:endParaRPr lang="ja-JP" altLang="en-US" sz="3600" dirty="0"/>
@@ -3712,8 +3749,8 @@
         </p:blipFill>
         <p:spPr>
           <a:xfrm>
-            <a:off x="2544109" y="1853516"/>
-            <a:ext cx="7103781" cy="3995878"/>
+            <a:off x="5557576" y="2419927"/>
+            <a:ext cx="6549495" cy="3684092"/>
           </a:xfrm>
           <a:prstGeom prst="rect">
             <a:avLst/>
@@ -3734,8 +3771,8 @@
         </p:nvSpPr>
         <p:spPr>
           <a:xfrm>
-            <a:off x="411018" y="1062181"/>
-            <a:ext cx="8432800" cy="646331"/>
+            <a:off x="263907" y="1273422"/>
+            <a:ext cx="10949709" cy="646331"/>
           </a:xfrm>
           <a:prstGeom prst="rect">
             <a:avLst/>
@@ -3754,11 +3791,19 @@
             </a:r>
             <a:r>
               <a:rPr lang="ja-JP" altLang="en-US" sz="3600" dirty="0"/>
-              <a:t>：ホラー</a:t>
+              <a:t>：</a:t>
             </a:r>
             <a:r>
               <a:rPr lang="en-US" altLang="ja-JP" sz="3600" dirty="0"/>
-              <a:t>	</a:t>
+              <a:t>3D</a:t>
+            </a:r>
+            <a:r>
+              <a:rPr lang="ja-JP" altLang="en-US" sz="3600" dirty="0"/>
+              <a:t>ホラー</a:t>
+            </a:r>
+            <a:r>
+              <a:rPr lang="en-US" altLang="ja-JP" sz="3600" dirty="0"/>
+              <a:t>		</a:t>
             </a:r>
             <a:r>
               <a:rPr lang="ja-JP" altLang="en-US" sz="3600" b="1" dirty="0"/>
@@ -3801,7 +3846,7 @@
         </p:nvSpPr>
         <p:spPr>
           <a:xfrm>
-            <a:off x="4520691" y="5914954"/>
+            <a:off x="8238836" y="6177685"/>
             <a:ext cx="3953164" cy="584775"/>
           </a:xfrm>
           <a:prstGeom prst="rect">
@@ -3823,6 +3868,298 @@
               <a:rPr kumimoji="1" lang="ja-JP" altLang="en-US" sz="3200" dirty="0"/>
               <a:t>参考</a:t>
             </a:r>
+          </a:p>
+        </p:txBody>
+      </p:sp>
+      <p:sp>
+        <p:nvSpPr>
+          <p:cNvPr id="5" name="テキスト ボックス 4">
+            <a:extLst>
+              <a:ext uri="{FF2B5EF4-FFF2-40B4-BE49-F238E27FC236}">
+                <a16:creationId xmlns:a16="http://schemas.microsoft.com/office/drawing/2014/main" id="{55356D1A-B60D-EC41-FEDB-1CB986CAC163}"/>
+              </a:ext>
+            </a:extLst>
+          </p:cNvPr>
+          <p:cNvSpPr txBox="1"/>
+          <p:nvPr/>
+        </p:nvSpPr>
+        <p:spPr>
+          <a:xfrm>
+            <a:off x="701964" y="81915"/>
+            <a:ext cx="3703782" cy="523220"/>
+          </a:xfrm>
+          <a:prstGeom prst="rect">
+            <a:avLst/>
+          </a:prstGeom>
+          <a:noFill/>
+        </p:spPr>
+        <p:txBody>
+          <a:bodyPr wrap="square" rtlCol="0">
+            <a:spAutoFit/>
+          </a:bodyPr>
+          <a:lstStyle/>
+          <a:p>
+            <a:r>
+              <a:rPr kumimoji="1" lang="ja-JP" altLang="en-US" sz="2800" dirty="0"/>
+              <a:t>スワー     エスケープ</a:t>
+            </a:r>
+          </a:p>
+        </p:txBody>
+      </p:sp>
+      <p:sp>
+        <p:nvSpPr>
+          <p:cNvPr id="11" name="字幕 2">
+            <a:extLst>
+              <a:ext uri="{FF2B5EF4-FFF2-40B4-BE49-F238E27FC236}">
+                <a16:creationId xmlns:a16="http://schemas.microsoft.com/office/drawing/2014/main" id="{058D9BFA-3589-4643-A037-63C9D08997AC}"/>
+              </a:ext>
+            </a:extLst>
+          </p:cNvPr>
+          <p:cNvSpPr txBox="1">
+            <a:spLocks/>
+          </p:cNvSpPr>
+          <p:nvPr/>
+        </p:nvSpPr>
+        <p:spPr>
+          <a:xfrm>
+            <a:off x="263907" y="3560326"/>
+            <a:ext cx="3953164" cy="2824885"/>
+          </a:xfrm>
+          <a:prstGeom prst="rect">
+            <a:avLst/>
+          </a:prstGeom>
+        </p:spPr>
+        <p:txBody>
+          <a:bodyPr vert="horz" lIns="91440" tIns="45720" rIns="91440" bIns="45720" rtlCol="0">
+            <a:normAutofit/>
+          </a:bodyPr>
+          <a:lstStyle>
+            <a:lvl1pPr marL="0" indent="0" algn="ctr" defTabSz="914400" rtl="0" eaLnBrk="1" latinLnBrk="0" hangingPunct="1">
+              <a:lnSpc>
+                <a:spcPct val="90000"/>
+              </a:lnSpc>
+              <a:spcBef>
+                <a:spcPts val="1000"/>
+              </a:spcBef>
+              <a:buFont typeface="Arial" panose="020B0604020202020204" pitchFamily="34" charset="0"/>
+              <a:buNone/>
+              <a:defRPr kumimoji="1" sz="2400" kern="1200">
+                <a:solidFill>
+                  <a:schemeClr val="tx1"/>
+                </a:solidFill>
+                <a:latin typeface="+mn-lt"/>
+                <a:ea typeface="+mn-ea"/>
+                <a:cs typeface="+mn-cs"/>
+              </a:defRPr>
+            </a:lvl1pPr>
+            <a:lvl2pPr marL="457200" indent="0" algn="ctr" defTabSz="914400" rtl="0" eaLnBrk="1" latinLnBrk="0" hangingPunct="1">
+              <a:lnSpc>
+                <a:spcPct val="90000"/>
+              </a:lnSpc>
+              <a:spcBef>
+                <a:spcPts val="500"/>
+              </a:spcBef>
+              <a:buFont typeface="Arial" panose="020B0604020202020204" pitchFamily="34" charset="0"/>
+              <a:buNone/>
+              <a:defRPr kumimoji="1" sz="2000" kern="1200">
+                <a:solidFill>
+                  <a:schemeClr val="tx1"/>
+                </a:solidFill>
+                <a:latin typeface="+mn-lt"/>
+                <a:ea typeface="+mn-ea"/>
+                <a:cs typeface="+mn-cs"/>
+              </a:defRPr>
+            </a:lvl2pPr>
+            <a:lvl3pPr marL="914400" indent="0" algn="ctr" defTabSz="914400" rtl="0" eaLnBrk="1" latinLnBrk="0" hangingPunct="1">
+              <a:lnSpc>
+                <a:spcPct val="90000"/>
+              </a:lnSpc>
+              <a:spcBef>
+                <a:spcPts val="500"/>
+              </a:spcBef>
+              <a:buFont typeface="Arial" panose="020B0604020202020204" pitchFamily="34" charset="0"/>
+              <a:buNone/>
+              <a:defRPr kumimoji="1" sz="1800" kern="1200">
+                <a:solidFill>
+                  <a:schemeClr val="tx1"/>
+                </a:solidFill>
+                <a:latin typeface="+mn-lt"/>
+                <a:ea typeface="+mn-ea"/>
+                <a:cs typeface="+mn-cs"/>
+              </a:defRPr>
+            </a:lvl3pPr>
+            <a:lvl4pPr marL="1371600" indent="0" algn="ctr" defTabSz="914400" rtl="0" eaLnBrk="1" latinLnBrk="0" hangingPunct="1">
+              <a:lnSpc>
+                <a:spcPct val="90000"/>
+              </a:lnSpc>
+              <a:spcBef>
+                <a:spcPts val="500"/>
+              </a:spcBef>
+              <a:buFont typeface="Arial" panose="020B0604020202020204" pitchFamily="34" charset="0"/>
+              <a:buNone/>
+              <a:defRPr kumimoji="1" sz="1600" kern="1200">
+                <a:solidFill>
+                  <a:schemeClr val="tx1"/>
+                </a:solidFill>
+                <a:latin typeface="+mn-lt"/>
+                <a:ea typeface="+mn-ea"/>
+                <a:cs typeface="+mn-cs"/>
+              </a:defRPr>
+            </a:lvl4pPr>
+            <a:lvl5pPr marL="1828800" indent="0" algn="ctr" defTabSz="914400" rtl="0" eaLnBrk="1" latinLnBrk="0" hangingPunct="1">
+              <a:lnSpc>
+                <a:spcPct val="90000"/>
+              </a:lnSpc>
+              <a:spcBef>
+                <a:spcPts val="500"/>
+              </a:spcBef>
+              <a:buFont typeface="Arial" panose="020B0604020202020204" pitchFamily="34" charset="0"/>
+              <a:buNone/>
+              <a:defRPr kumimoji="1" sz="1600" kern="1200">
+                <a:solidFill>
+                  <a:schemeClr val="tx1"/>
+                </a:solidFill>
+                <a:latin typeface="+mn-lt"/>
+                <a:ea typeface="+mn-ea"/>
+                <a:cs typeface="+mn-cs"/>
+              </a:defRPr>
+            </a:lvl5pPr>
+            <a:lvl6pPr marL="2286000" indent="0" algn="ctr" defTabSz="914400" rtl="0" eaLnBrk="1" latinLnBrk="0" hangingPunct="1">
+              <a:lnSpc>
+                <a:spcPct val="90000"/>
+              </a:lnSpc>
+              <a:spcBef>
+                <a:spcPts val="500"/>
+              </a:spcBef>
+              <a:buFont typeface="Arial" panose="020B0604020202020204" pitchFamily="34" charset="0"/>
+              <a:buNone/>
+              <a:defRPr kumimoji="1" sz="1600" kern="1200">
+                <a:solidFill>
+                  <a:schemeClr val="tx1"/>
+                </a:solidFill>
+                <a:latin typeface="+mn-lt"/>
+                <a:ea typeface="+mn-ea"/>
+                <a:cs typeface="+mn-cs"/>
+              </a:defRPr>
+            </a:lvl6pPr>
+            <a:lvl7pPr marL="2743200" indent="0" algn="ctr" defTabSz="914400" rtl="0" eaLnBrk="1" latinLnBrk="0" hangingPunct="1">
+              <a:lnSpc>
+                <a:spcPct val="90000"/>
+              </a:lnSpc>
+              <a:spcBef>
+                <a:spcPts val="500"/>
+              </a:spcBef>
+              <a:buFont typeface="Arial" panose="020B0604020202020204" pitchFamily="34" charset="0"/>
+              <a:buNone/>
+              <a:defRPr kumimoji="1" sz="1600" kern="1200">
+                <a:solidFill>
+                  <a:schemeClr val="tx1"/>
+                </a:solidFill>
+                <a:latin typeface="+mn-lt"/>
+                <a:ea typeface="+mn-ea"/>
+                <a:cs typeface="+mn-cs"/>
+              </a:defRPr>
+            </a:lvl7pPr>
+            <a:lvl8pPr marL="3200400" indent="0" algn="ctr" defTabSz="914400" rtl="0" eaLnBrk="1" latinLnBrk="0" hangingPunct="1">
+              <a:lnSpc>
+                <a:spcPct val="90000"/>
+              </a:lnSpc>
+              <a:spcBef>
+                <a:spcPts val="500"/>
+              </a:spcBef>
+              <a:buFont typeface="Arial" panose="020B0604020202020204" pitchFamily="34" charset="0"/>
+              <a:buNone/>
+              <a:defRPr kumimoji="1" sz="1600" kern="1200">
+                <a:solidFill>
+                  <a:schemeClr val="tx1"/>
+                </a:solidFill>
+                <a:latin typeface="+mn-lt"/>
+                <a:ea typeface="+mn-ea"/>
+                <a:cs typeface="+mn-cs"/>
+              </a:defRPr>
+            </a:lvl8pPr>
+            <a:lvl9pPr marL="3657600" indent="0" algn="ctr" defTabSz="914400" rtl="0" eaLnBrk="1" latinLnBrk="0" hangingPunct="1">
+              <a:lnSpc>
+                <a:spcPct val="90000"/>
+              </a:lnSpc>
+              <a:spcBef>
+                <a:spcPts val="500"/>
+              </a:spcBef>
+              <a:buFont typeface="Arial" panose="020B0604020202020204" pitchFamily="34" charset="0"/>
+              <a:buNone/>
+              <a:defRPr kumimoji="1" sz="1600" kern="1200">
+                <a:solidFill>
+                  <a:schemeClr val="tx1"/>
+                </a:solidFill>
+                <a:latin typeface="+mn-lt"/>
+                <a:ea typeface="+mn-ea"/>
+                <a:cs typeface="+mn-cs"/>
+              </a:defRPr>
+            </a:lvl9pPr>
+          </a:lstStyle>
+          <a:p>
+            <a:pPr algn="l"/>
+            <a:r>
+              <a:rPr lang="ja-JP" altLang="en-US" sz="3600" b="1" dirty="0"/>
+              <a:t>チーム名</a:t>
+            </a:r>
+            <a:r>
+              <a:rPr lang="ja-JP" altLang="en-US" sz="3600" dirty="0"/>
+              <a:t>：メガネ</a:t>
+            </a:r>
+            <a:endParaRPr lang="en-US" altLang="ja-JP" sz="3600" dirty="0"/>
+          </a:p>
+          <a:p>
+            <a:pPr algn="l"/>
+            <a:r>
+              <a:rPr lang="ja-JP" altLang="en-US" sz="2800" b="1" dirty="0"/>
+              <a:t>メンバー</a:t>
+            </a:r>
+            <a:endParaRPr lang="en-US" altLang="ja-JP" sz="3600" b="1" dirty="0"/>
+          </a:p>
+          <a:p>
+            <a:pPr algn="l"/>
+            <a:r>
+              <a:rPr lang="ja-JP" altLang="en-US" dirty="0"/>
+              <a:t>船迫　由雅</a:t>
+            </a:r>
+            <a:endParaRPr lang="en-US" altLang="ja-JP" dirty="0"/>
+          </a:p>
+          <a:p>
+            <a:pPr algn="l"/>
+            <a:r>
+              <a:rPr lang="ja-JP" altLang="en-US" sz="2000" dirty="0"/>
+              <a:t>武部　伝</a:t>
+            </a:r>
+            <a:endParaRPr lang="en-US" altLang="ja-JP" sz="2000" dirty="0"/>
+          </a:p>
+          <a:p>
+            <a:pPr algn="l"/>
+            <a:r>
+              <a:rPr lang="ja-JP" altLang="en-US" sz="2000" dirty="0"/>
+              <a:t>寺尾　彪翔</a:t>
+            </a:r>
+            <a:endParaRPr lang="en-US" altLang="ja-JP" sz="2000" dirty="0"/>
+          </a:p>
+          <a:p>
+            <a:pPr algn="l"/>
+            <a:r>
+              <a:rPr lang="ja-JP" altLang="en-US" sz="2000" dirty="0"/>
+              <a:t>野田　蒼磨</a:t>
+            </a:r>
+            <a:endParaRPr lang="en-US" altLang="ja-JP" sz="2000" dirty="0"/>
+          </a:p>
+          <a:p>
+            <a:pPr algn="l"/>
+            <a:endParaRPr lang="ja-JP" altLang="en-US" sz="3600" dirty="0"/>
+          </a:p>
+          <a:p>
+            <a:pPr algn="l"/>
+            <a:endParaRPr lang="en-US" altLang="ja-JP" sz="3500" dirty="0"/>
+          </a:p>
+          <a:p>
+            <a:pPr algn="l"/>
+            <a:endParaRPr lang="en-US" altLang="ja-JP" sz="3500" dirty="0"/>
           </a:p>
         </p:txBody>
       </p:sp>
@@ -3874,8 +4211,8 @@
         </p:nvSpPr>
         <p:spPr>
           <a:xfrm>
-            <a:off x="378691" y="966622"/>
-            <a:ext cx="5961494" cy="1872384"/>
+            <a:off x="1237672" y="2515734"/>
+            <a:ext cx="10067637" cy="1400484"/>
           </a:xfrm>
         </p:spPr>
         <p:txBody>
@@ -3884,64 +4221,204 @@
           </a:bodyPr>
           <a:lstStyle/>
           <a:p>
-            <a:r>
-              <a:rPr lang="ja-JP" altLang="en-US" sz="4000" b="1" dirty="0"/>
+            <a:pPr marL="0" indent="0" algn="ctr">
+              <a:lnSpc>
+                <a:spcPct val="110000"/>
+              </a:lnSpc>
+              <a:buNone/>
+            </a:pPr>
+            <a:r>
+              <a:rPr lang="ja-JP" altLang="en-US" sz="7200" b="1" dirty="0"/>
               <a:t>コンセプト</a:t>
             </a:r>
             <a:r>
-              <a:rPr lang="en-US" altLang="ja-JP" sz="4000" dirty="0"/>
+              <a:rPr lang="en-US" altLang="ja-JP" sz="7200" dirty="0"/>
               <a:t>:</a:t>
             </a:r>
             <a:r>
-              <a:rPr lang="ja-JP" altLang="en-US" sz="4000" dirty="0"/>
-              <a:t>「逃げる」</a:t>
-            </a:r>
-            <a:endParaRPr lang="en-US" altLang="ja-JP" sz="3200" dirty="0"/>
-          </a:p>
-          <a:p>
-            <a:r>
-              <a:rPr lang="ja-JP" altLang="en-US" sz="3200" b="1" dirty="0"/>
+              <a:rPr lang="ja-JP" altLang="en-US" sz="7200" dirty="0"/>
+              <a:t>「</a:t>
+            </a:r>
+            <a:r>
+              <a:rPr lang="ja-JP" altLang="en-US" sz="7200" b="1" dirty="0">
+                <a:solidFill>
+                  <a:srgbClr val="FF0000"/>
+                </a:solidFill>
+              </a:rPr>
+              <a:t>逃げる</a:t>
+            </a:r>
+            <a:r>
+              <a:rPr lang="ja-JP" altLang="en-US" sz="7200" dirty="0"/>
+              <a:t>」</a:t>
+            </a:r>
+            <a:endParaRPr lang="en-US" altLang="ja-JP" sz="5400" dirty="0"/>
+          </a:p>
+          <a:p>
+            <a:pPr algn="ctr">
+              <a:lnSpc>
+                <a:spcPct val="110000"/>
+              </a:lnSpc>
+            </a:pPr>
+            <a:endParaRPr lang="en-US" altLang="ja-JP" sz="1600" b="1" dirty="0"/>
+          </a:p>
+        </p:txBody>
+      </p:sp>
+    </p:spTree>
+    <p:extLst>
+      <p:ext uri="{BB962C8B-B14F-4D97-AF65-F5344CB8AC3E}">
+        <p14:creationId xmlns:p14="http://schemas.microsoft.com/office/powerpoint/2010/main" val="1878638175"/>
+      </p:ext>
+    </p:extLst>
+  </p:cSld>
+  <p:clrMapOvr>
+    <a:masterClrMapping/>
+  </p:clrMapOvr>
+</p:sld>
+</file>
+
+<file path=ppt/slides/slide3.xml><?xml version="1.0" encoding="utf-8"?>
+<p:sld xmlns:a="http://schemas.openxmlformats.org/drawingml/2006/main" xmlns:r="http://schemas.openxmlformats.org/officeDocument/2006/relationships" xmlns:p="http://schemas.openxmlformats.org/presentationml/2006/main">
+  <p:cSld>
+    <p:spTree>
+      <p:nvGrpSpPr>
+        <p:cNvPr id="1" name=""/>
+        <p:cNvGrpSpPr/>
+        <p:nvPr/>
+      </p:nvGrpSpPr>
+      <p:grpSpPr>
+        <a:xfrm>
+          <a:off x="0" y="0"/>
+          <a:ext cx="0" cy="0"/>
+          <a:chOff x="0" y="0"/>
+          <a:chExt cx="0" cy="0"/>
+        </a:xfrm>
+      </p:grpSpPr>
+      <p:sp>
+        <p:nvSpPr>
+          <p:cNvPr id="3" name="コンテンツ プレースホルダー 2">
+            <a:extLst>
+              <a:ext uri="{FF2B5EF4-FFF2-40B4-BE49-F238E27FC236}">
+                <a16:creationId xmlns:a16="http://schemas.microsoft.com/office/drawing/2014/main" id="{7EBBA3DB-0A0B-2F51-C722-A994A95B4E19}"/>
+              </a:ext>
+            </a:extLst>
+          </p:cNvPr>
+          <p:cNvSpPr>
+            <a:spLocks noGrp="1"/>
+          </p:cNvSpPr>
+          <p:nvPr>
+            <p:ph idx="1"/>
+          </p:nvPr>
+        </p:nvSpPr>
+        <p:spPr>
+          <a:xfrm>
+            <a:off x="921325" y="560244"/>
+            <a:ext cx="10947402" cy="2349211"/>
+          </a:xfrm>
+        </p:spPr>
+        <p:txBody>
+          <a:bodyPr>
+            <a:normAutofit fontScale="85000" lnSpcReduction="20000"/>
+          </a:bodyPr>
+          <a:lstStyle/>
+          <a:p>
+            <a:pPr marL="0" indent="0">
+              <a:buNone/>
+            </a:pPr>
+            <a:r>
+              <a:rPr lang="ja-JP" altLang="en-US" sz="5600" b="1" dirty="0"/>
               <a:t>ターゲット</a:t>
             </a:r>
             <a:r>
-              <a:rPr lang="en-US" altLang="ja-JP" sz="3200" dirty="0"/>
+              <a:rPr lang="en-US" altLang="ja-JP" sz="5600" dirty="0"/>
               <a:t>: </a:t>
             </a:r>
             <a:r>
-              <a:rPr lang="en-US" altLang="ja-JP" sz="3200" dirty="0" err="1"/>
+              <a:rPr lang="en-US" altLang="ja-JP" sz="5600" dirty="0" err="1"/>
               <a:t>DarkDeception</a:t>
             </a:r>
             <a:r>
-              <a:rPr lang="ja-JP" altLang="en-US" sz="3200" dirty="0"/>
+              <a:rPr lang="ja-JP" altLang="en-US" sz="5600" dirty="0"/>
               <a:t>を</a:t>
             </a:r>
-            <a:endParaRPr lang="en-US" altLang="ja-JP" sz="3200" dirty="0"/>
+            <a:endParaRPr lang="en-US" altLang="ja-JP" sz="5600" dirty="0"/>
           </a:p>
           <a:p>
             <a:pPr marL="0" indent="0">
               <a:buNone/>
             </a:pPr>
             <a:r>
-              <a:rPr lang="en-US" altLang="ja-JP" sz="3200" dirty="0"/>
+              <a:rPr lang="en-US" altLang="ja-JP" sz="5600" dirty="0"/>
               <a:t>	   </a:t>
             </a:r>
             <a:r>
-              <a:rPr lang="ja-JP" altLang="en-US" sz="3200" dirty="0"/>
+              <a:rPr lang="ja-JP" altLang="en-US" sz="5600" dirty="0"/>
               <a:t>プレイしたことがある人</a:t>
             </a:r>
-            <a:endParaRPr lang="en-US" altLang="ja-JP" sz="3200" dirty="0"/>
-          </a:p>
-          <a:p>
-            <a:endParaRPr lang="en-US" altLang="ja-JP" sz="3200" b="1" dirty="0"/>
+            <a:endParaRPr lang="en-US" altLang="ja-JP" sz="5600" dirty="0"/>
+          </a:p>
+          <a:p>
+            <a:pPr marL="0" indent="0">
+              <a:buNone/>
+            </a:pPr>
+            <a:r>
+              <a:rPr lang="en-US" altLang="ja-JP" sz="3800" dirty="0"/>
+              <a:t>(</a:t>
+            </a:r>
+            <a:r>
+              <a:rPr lang="ja-JP" altLang="en-US" sz="3800" dirty="0"/>
+              <a:t>販売本数を</a:t>
+            </a:r>
+            <a:r>
+              <a:rPr lang="en-US" altLang="ja-JP" sz="3800" dirty="0"/>
+              <a:t>AI</a:t>
+            </a:r>
+            <a:r>
+              <a:rPr lang="ja-JP" altLang="en-US" sz="3800" dirty="0"/>
+              <a:t>で概算した結果、推定</a:t>
+            </a:r>
+            <a:r>
+              <a:rPr lang="en-US" altLang="ja-JP" sz="3800" dirty="0"/>
+              <a:t>80</a:t>
+            </a:r>
+            <a:r>
+              <a:rPr lang="ja-JP" altLang="en-US" sz="3800" dirty="0"/>
+              <a:t>万人と判明。</a:t>
+            </a:r>
+            <a:endParaRPr lang="en-US" altLang="ja-JP" sz="3800" dirty="0"/>
+          </a:p>
+          <a:p>
+            <a:pPr marL="0" indent="0">
+              <a:buNone/>
+            </a:pPr>
+            <a:r>
+              <a:rPr lang="ja-JP" altLang="en-US" sz="3800" dirty="0"/>
+              <a:t>そのためその半分未満とし約</a:t>
+            </a:r>
+            <a:r>
+              <a:rPr lang="en-US" altLang="ja-JP" sz="3800" dirty="0"/>
+              <a:t>30</a:t>
+            </a:r>
+            <a:r>
+              <a:rPr lang="ja-JP" altLang="en-US" sz="3800" dirty="0"/>
+              <a:t>万人をターゲットとする</a:t>
+            </a:r>
+            <a:r>
+              <a:rPr lang="en-US" altLang="ja-JP" sz="3800" dirty="0"/>
+              <a:t>)</a:t>
+            </a:r>
+          </a:p>
+          <a:p>
+            <a:pPr lvl="3"/>
+            <a:endParaRPr kumimoji="1" lang="ja-JP" altLang="en-US" dirty="0"/>
           </a:p>
         </p:txBody>
       </p:sp>
       <p:pic>
         <p:nvPicPr>
-          <p:cNvPr id="4" name="図 3">
-            <a:extLst>
-              <a:ext uri="{FF2B5EF4-FFF2-40B4-BE49-F238E27FC236}">
-                <a16:creationId xmlns:a16="http://schemas.microsoft.com/office/drawing/2014/main" id="{93576C4F-5955-1C6F-2D53-6EF8A6576881}"/>
+          <p:cNvPr id="5" name="図 4">
+            <a:extLst>
+              <a:ext uri="{FF2B5EF4-FFF2-40B4-BE49-F238E27FC236}">
+                <a16:creationId xmlns:a16="http://schemas.microsoft.com/office/drawing/2014/main" id="{8C4E084F-5B25-6674-FECF-277F0773598E}"/>
               </a:ext>
             </a:extLst>
           </p:cNvPr>
@@ -3958,81 +4435,214 @@
         </p:blipFill>
         <p:spPr>
           <a:xfrm>
-            <a:off x="6965187" y="966622"/>
-            <a:ext cx="5073835" cy="2600420"/>
+            <a:off x="3008670" y="2909455"/>
+            <a:ext cx="6174659" cy="3164610"/>
           </a:xfrm>
           <a:prstGeom prst="rect">
             <a:avLst/>
           </a:prstGeom>
         </p:spPr>
       </p:pic>
-      <p:sp>
-        <p:nvSpPr>
-          <p:cNvPr id="5" name="テキスト ボックス 4">
-            <a:extLst>
-              <a:ext uri="{FF2B5EF4-FFF2-40B4-BE49-F238E27FC236}">
-                <a16:creationId xmlns:a16="http://schemas.microsoft.com/office/drawing/2014/main" id="{5E83F1E2-E26E-711F-B61B-3BB2D4E31098}"/>
-              </a:ext>
-            </a:extLst>
-          </p:cNvPr>
-          <p:cNvSpPr txBox="1"/>
-          <p:nvPr/>
-        </p:nvSpPr>
-        <p:spPr>
-          <a:xfrm>
-            <a:off x="378691" y="3059834"/>
-            <a:ext cx="6945746" cy="2831544"/>
-          </a:xfrm>
-          <a:prstGeom prst="rect">
-            <a:avLst/>
-          </a:prstGeom>
-          <a:noFill/>
-        </p:spPr>
-        <p:txBody>
-          <a:bodyPr wrap="square" rtlCol="0">
-            <a:spAutoFit/>
-          </a:bodyPr>
-          <a:lstStyle/>
-          <a:p>
-            <a:r>
-              <a:rPr lang="ja-JP" altLang="en-US" sz="3200" b="1" dirty="0"/>
-              <a:t>ゲーム概要</a:t>
-            </a:r>
-            <a:endParaRPr lang="en-US" altLang="ja-JP" sz="3200" b="1" dirty="0"/>
-          </a:p>
-          <a:p>
-            <a:r>
-              <a:rPr lang="ja-JP" altLang="en-US" sz="3200" b="1" dirty="0"/>
-              <a:t>・</a:t>
-            </a:r>
-            <a:r>
-              <a:rPr lang="ja-JP" altLang="en-US" sz="3200" dirty="0"/>
-              <a:t>プレイヤーを操作して鍵のかけらを集めて脱出する</a:t>
-            </a:r>
-          </a:p>
-          <a:p>
-            <a:r>
-              <a:rPr lang="ja-JP" altLang="en-US" sz="3200" dirty="0"/>
-              <a:t>後半になるにつれて難易度が上がる</a:t>
-            </a:r>
-            <a:endParaRPr lang="en-US" altLang="ja-JP" sz="3200" dirty="0"/>
-          </a:p>
-          <a:p>
-            <a:r>
-              <a:rPr lang="ja-JP" altLang="en-US" sz="3200" dirty="0"/>
-              <a:t>コントローラーで操作</a:t>
-            </a:r>
-            <a:endParaRPr lang="ja-JP" altLang="en-US" sz="1100" dirty="0"/>
-          </a:p>
-          <a:p>
-            <a:endParaRPr kumimoji="1" lang="ja-JP" altLang="en-US" dirty="0"/>
-          </a:p>
-        </p:txBody>
-      </p:sp>
     </p:spTree>
     <p:extLst>
       <p:ext uri="{BB962C8B-B14F-4D97-AF65-F5344CB8AC3E}">
-        <p14:creationId xmlns:p14="http://schemas.microsoft.com/office/powerpoint/2010/main" val="1878638175"/>
+        <p14:creationId xmlns:p14="http://schemas.microsoft.com/office/powerpoint/2010/main" val="4248569436"/>
+      </p:ext>
+    </p:extLst>
+  </p:cSld>
+  <p:clrMapOvr>
+    <a:masterClrMapping/>
+  </p:clrMapOvr>
+</p:sld>
+</file>
+
+<file path=ppt/slides/slide4.xml><?xml version="1.0" encoding="utf-8"?>
+<p:sld xmlns:a="http://schemas.openxmlformats.org/drawingml/2006/main" xmlns:r="http://schemas.openxmlformats.org/officeDocument/2006/relationships" xmlns:p="http://schemas.openxmlformats.org/presentationml/2006/main">
+  <p:cSld>
+    <p:spTree>
+      <p:nvGrpSpPr>
+        <p:cNvPr id="1" name=""/>
+        <p:cNvGrpSpPr/>
+        <p:nvPr/>
+      </p:nvGrpSpPr>
+      <p:grpSpPr>
+        <a:xfrm>
+          <a:off x="0" y="0"/>
+          <a:ext cx="0" cy="0"/>
+          <a:chOff x="0" y="0"/>
+          <a:chExt cx="0" cy="0"/>
+        </a:xfrm>
+      </p:grpSpPr>
+      <p:sp>
+        <p:nvSpPr>
+          <p:cNvPr id="3" name="コンテンツ プレースホルダー 2">
+            <a:extLst>
+              <a:ext uri="{FF2B5EF4-FFF2-40B4-BE49-F238E27FC236}">
+                <a16:creationId xmlns:a16="http://schemas.microsoft.com/office/drawing/2014/main" id="{A4889A58-1010-D491-4103-B01FDACBA81C}"/>
+              </a:ext>
+            </a:extLst>
+          </p:cNvPr>
+          <p:cNvSpPr>
+            <a:spLocks noGrp="1"/>
+          </p:cNvSpPr>
+          <p:nvPr>
+            <p:ph idx="1"/>
+          </p:nvPr>
+        </p:nvSpPr>
+        <p:spPr>
+          <a:xfrm>
+            <a:off x="471055" y="175491"/>
+            <a:ext cx="11490036" cy="6465454"/>
+          </a:xfrm>
+        </p:spPr>
+        <p:txBody>
+          <a:bodyPr>
+            <a:normAutofit lnSpcReduction="10000"/>
+          </a:bodyPr>
+          <a:lstStyle/>
+          <a:p>
+            <a:pPr marL="0" indent="0">
+              <a:buNone/>
+            </a:pPr>
+            <a:r>
+              <a:rPr lang="ja-JP" altLang="en-US" sz="4000" b="1" dirty="0"/>
+              <a:t>ゲーム概要</a:t>
+            </a:r>
+            <a:endParaRPr lang="en-US" altLang="ja-JP" sz="4000" b="1" dirty="0"/>
+          </a:p>
+          <a:p>
+            <a:r>
+              <a:rPr lang="ja-JP" altLang="en-US" dirty="0"/>
+              <a:t>ゲームスタートしたらロビー</a:t>
+            </a:r>
+            <a:r>
+              <a:rPr lang="en-US" altLang="ja-JP" dirty="0"/>
+              <a:t>(</a:t>
+            </a:r>
+            <a:r>
+              <a:rPr lang="ja-JP" altLang="en-US" dirty="0"/>
+              <a:t>初期地点</a:t>
+            </a:r>
+            <a:r>
+              <a:rPr lang="en-US" altLang="ja-JP" dirty="0"/>
+              <a:t>)</a:t>
+            </a:r>
+            <a:r>
+              <a:rPr lang="ja-JP" altLang="en-US" dirty="0"/>
+              <a:t>からスポーンする</a:t>
+            </a:r>
+            <a:endParaRPr lang="en-US" altLang="ja-JP" dirty="0"/>
+          </a:p>
+          <a:p>
+            <a:r>
+              <a:rPr lang="ja-JP" altLang="en-US" dirty="0"/>
+              <a:t>プレイヤーを操作して鍵のかけらを集めて脱出する</a:t>
+            </a:r>
+            <a:r>
+              <a:rPr lang="en-US" altLang="ja-JP" dirty="0"/>
+              <a:t>(</a:t>
+            </a:r>
+            <a:r>
+              <a:rPr lang="ja-JP" altLang="en-US" dirty="0"/>
+              <a:t>かけらを全部集めるとロビーが脱出口になって脱出可能になる</a:t>
+            </a:r>
+            <a:r>
+              <a:rPr lang="en-US" altLang="ja-JP" dirty="0"/>
+              <a:t>)</a:t>
+            </a:r>
+          </a:p>
+          <a:p>
+            <a:r>
+              <a:rPr lang="ja-JP" altLang="en-US" dirty="0"/>
+              <a:t>かけら数と残機数は常に画面内に表示</a:t>
+            </a:r>
+          </a:p>
+          <a:p>
+            <a:r>
+              <a:rPr lang="ja-JP" altLang="en-US" dirty="0"/>
+              <a:t>後半になるにつれて難易度が上がる</a:t>
+            </a:r>
+            <a:r>
+              <a:rPr lang="en-US" altLang="ja-JP" dirty="0"/>
+              <a:t>(</a:t>
+            </a:r>
+            <a:r>
+              <a:rPr lang="ja-JP" altLang="en-US" dirty="0"/>
+              <a:t>かけら取得数に応じて敵の数が増える</a:t>
+            </a:r>
+            <a:r>
+              <a:rPr lang="en-US" altLang="ja-JP" dirty="0"/>
+              <a:t>)</a:t>
+            </a:r>
+          </a:p>
+          <a:p>
+            <a:r>
+              <a:rPr lang="ja-JP" altLang="en-US" dirty="0"/>
+              <a:t>敵はマップ内を徘徊してプレイヤーに近づいたときにプレイヤーを追従する</a:t>
+            </a:r>
+            <a:endParaRPr lang="en-US" altLang="ja-JP" dirty="0"/>
+          </a:p>
+          <a:p>
+            <a:r>
+              <a:rPr lang="ja-JP" altLang="en-US" dirty="0"/>
+              <a:t>追従は索敵範囲外に出たら徘徊状態に戻る</a:t>
+            </a:r>
+            <a:endParaRPr lang="en-US" altLang="ja-JP" dirty="0"/>
+          </a:p>
+          <a:p>
+            <a:r>
+              <a:rPr lang="ja-JP" altLang="en-US" dirty="0"/>
+              <a:t>敵につかまると初期地点に戻されて残機が減りかけら数が引き継がれる</a:t>
+            </a:r>
+            <a:endParaRPr lang="en-US" altLang="ja-JP" dirty="0"/>
+          </a:p>
+          <a:p>
+            <a:r>
+              <a:rPr lang="ja-JP" altLang="en-US" dirty="0"/>
+              <a:t>残機が</a:t>
+            </a:r>
+            <a:r>
+              <a:rPr lang="en-US" altLang="ja-JP" dirty="0"/>
+              <a:t>0</a:t>
+            </a:r>
+            <a:r>
+              <a:rPr lang="ja-JP" altLang="en-US" dirty="0"/>
+              <a:t>になるとゲームオーバー</a:t>
+            </a:r>
+            <a:endParaRPr lang="en-US" altLang="ja-JP" dirty="0"/>
+          </a:p>
+          <a:p>
+            <a:r>
+              <a:rPr lang="ja-JP" altLang="en-US" dirty="0"/>
+              <a:t>コントローラー</a:t>
+            </a:r>
+            <a:r>
+              <a:rPr lang="en-US" altLang="ja-JP" dirty="0"/>
+              <a:t>(</a:t>
+            </a:r>
+            <a:r>
+              <a:rPr lang="ja-JP" altLang="en-US" dirty="0"/>
+              <a:t>キーボード</a:t>
+            </a:r>
+            <a:r>
+              <a:rPr lang="en-US" altLang="ja-JP" dirty="0"/>
+              <a:t>)</a:t>
+            </a:r>
+            <a:r>
+              <a:rPr lang="ja-JP" altLang="en-US" dirty="0"/>
+              <a:t>で操作</a:t>
+            </a:r>
+            <a:endParaRPr lang="ja-JP" altLang="en-US" sz="1050" dirty="0"/>
+          </a:p>
+          <a:p>
+            <a:endParaRPr kumimoji="1" lang="ja-JP" altLang="en-US" dirty="0"/>
+          </a:p>
+        </p:txBody>
+      </p:sp>
+    </p:spTree>
+    <p:extLst>
+      <p:ext uri="{BB962C8B-B14F-4D97-AF65-F5344CB8AC3E}">
+        <p14:creationId xmlns:p14="http://schemas.microsoft.com/office/powerpoint/2010/main" val="3795403796"/>
       </p:ext>
     </p:extLst>
   </p:cSld>

--- a/SewerEscape企画書.pptx
+++ b/SewerEscape企画書.pptx
@@ -9,6 +9,7 @@
     <p:sldId id="257" r:id="rId3"/>
     <p:sldId id="258" r:id="rId4"/>
     <p:sldId id="259" r:id="rId5"/>
+    <p:sldId id="260" r:id="rId6"/>
   </p:sldIdLst>
   <p:sldSz cx="12192000" cy="6858000"/>
   <p:notesSz cx="6858000" cy="9144000"/>
@@ -3635,22 +3636,22 @@
         </p:nvSpPr>
         <p:spPr>
           <a:xfrm>
-            <a:off x="255987" y="482025"/>
+            <a:off x="846121" y="422105"/>
             <a:ext cx="10056413" cy="775856"/>
           </a:xfrm>
         </p:spPr>
         <p:txBody>
           <a:bodyPr>
-            <a:normAutofit/>
+            <a:normAutofit fontScale="90000"/>
           </a:bodyPr>
           <a:lstStyle/>
           <a:p>
             <a:r>
-              <a:rPr kumimoji="1" lang="en-US" altLang="ja-JP" sz="4800" b="1" dirty="0"/>
+              <a:rPr kumimoji="1" lang="en-US" altLang="ja-JP" sz="5400" b="1" dirty="0"/>
               <a:t>Sewer Escape</a:t>
             </a:r>
             <a:r>
-              <a:rPr kumimoji="1" lang="ja-JP" altLang="en-US" sz="4800" b="1" dirty="0"/>
+              <a:rPr kumimoji="1" lang="ja-JP" altLang="en-US" sz="5400" b="1" dirty="0"/>
               <a:t>（下水道からの脱出）</a:t>
             </a:r>
           </a:p>
@@ -3674,8 +3675,8 @@
         </p:nvSpPr>
         <p:spPr>
           <a:xfrm>
-            <a:off x="263907" y="2065909"/>
-            <a:ext cx="5028529" cy="1286891"/>
+            <a:off x="245434" y="2179965"/>
+            <a:ext cx="5028529" cy="646331"/>
           </a:xfrm>
         </p:spPr>
         <p:txBody>
@@ -3696,17 +3697,6 @@
             <a:r>
               <a:rPr lang="en-US" altLang="ja-JP" sz="3600" dirty="0"/>
               <a:t>PC</a:t>
-            </a:r>
-          </a:p>
-          <a:p>
-            <a:pPr algn="l"/>
-            <a:r>
-              <a:rPr lang="ja-JP" altLang="en-US" sz="3600" b="1" dirty="0"/>
-              <a:t>使用エンジン：</a:t>
-            </a:r>
-            <a:r>
-              <a:rPr lang="en-US" altLang="ja-JP" sz="3600" dirty="0"/>
-              <a:t>Unity</a:t>
             </a:r>
           </a:p>
           <a:p>
@@ -3771,8 +3761,8 @@
         </p:nvSpPr>
         <p:spPr>
           <a:xfrm>
-            <a:off x="263907" y="1273422"/>
-            <a:ext cx="10949709" cy="646331"/>
+            <a:off x="245434" y="1245919"/>
+            <a:ext cx="9157184" cy="646331"/>
           </a:xfrm>
           <a:prstGeom prst="rect">
             <a:avLst/>
@@ -3846,7 +3836,7 @@
         </p:nvSpPr>
         <p:spPr>
           <a:xfrm>
-            <a:off x="8238836" y="6177685"/>
+            <a:off x="7260452" y="6216589"/>
             <a:ext cx="3953164" cy="584775"/>
           </a:xfrm>
           <a:prstGeom prst="rect">
@@ -3885,8 +3875,8 @@
         </p:nvSpPr>
         <p:spPr>
           <a:xfrm>
-            <a:off x="701964" y="81915"/>
-            <a:ext cx="3703782" cy="523220"/>
+            <a:off x="1289466" y="90334"/>
+            <a:ext cx="4267200" cy="523220"/>
           </a:xfrm>
           <a:prstGeom prst="rect">
             <a:avLst/>
@@ -3922,8 +3912,8 @@
         </p:nvSpPr>
         <p:spPr>
           <a:xfrm>
-            <a:off x="263907" y="3560326"/>
-            <a:ext cx="3953164" cy="2824885"/>
+            <a:off x="245434" y="4945384"/>
+            <a:ext cx="3953164" cy="1855980"/>
           </a:xfrm>
           <a:prstGeom prst="rect">
             <a:avLst/>
@@ -4100,33 +4090,33 @@
           <a:p>
             <a:pPr algn="l"/>
             <a:r>
-              <a:rPr lang="ja-JP" altLang="en-US" sz="3600" b="1" dirty="0"/>
+              <a:rPr lang="ja-JP" altLang="en-US" sz="2800" b="1" dirty="0"/>
               <a:t>チーム名</a:t>
             </a:r>
             <a:r>
-              <a:rPr lang="ja-JP" altLang="en-US" sz="3600" dirty="0"/>
+              <a:rPr lang="ja-JP" altLang="en-US" sz="2800" dirty="0"/>
               <a:t>：メガネ</a:t>
             </a:r>
-            <a:endParaRPr lang="en-US" altLang="ja-JP" sz="3600" dirty="0"/>
+            <a:endParaRPr lang="en-US" altLang="ja-JP" sz="2800" dirty="0"/>
           </a:p>
           <a:p>
             <a:pPr algn="l"/>
             <a:r>
-              <a:rPr lang="ja-JP" altLang="en-US" sz="2800" b="1" dirty="0"/>
+              <a:rPr lang="ja-JP" altLang="en-US" b="1" dirty="0"/>
               <a:t>メンバー</a:t>
             </a:r>
-            <a:endParaRPr lang="en-US" altLang="ja-JP" sz="3600" b="1" dirty="0"/>
+            <a:endParaRPr lang="en-US" altLang="ja-JP" sz="3200" b="1" dirty="0"/>
           </a:p>
           <a:p>
             <a:pPr algn="l"/>
             <a:r>
-              <a:rPr lang="ja-JP" altLang="en-US" dirty="0"/>
+              <a:rPr lang="ja-JP" altLang="en-US" sz="2000" dirty="0"/>
               <a:t>船迫　由雅</a:t>
             </a:r>
-            <a:endParaRPr lang="en-US" altLang="ja-JP" dirty="0"/>
-          </a:p>
-          <a:p>
-            <a:pPr algn="l"/>
+            <a:r>
+              <a:rPr lang="en-US" altLang="ja-JP" sz="2000" dirty="0"/>
+              <a:t>	</a:t>
+            </a:r>
             <a:r>
               <a:rPr lang="ja-JP" altLang="en-US" sz="2000" dirty="0"/>
               <a:t>武部　伝</a:t>
@@ -4139,10 +4129,10 @@
               <a:rPr lang="ja-JP" altLang="en-US" sz="2000" dirty="0"/>
               <a:t>寺尾　彪翔</a:t>
             </a:r>
-            <a:endParaRPr lang="en-US" altLang="ja-JP" sz="2000" dirty="0"/>
-          </a:p>
-          <a:p>
-            <a:pPr algn="l"/>
+            <a:r>
+              <a:rPr lang="en-US" altLang="ja-JP" sz="2000" dirty="0"/>
+              <a:t>	</a:t>
+            </a:r>
             <a:r>
               <a:rPr lang="ja-JP" altLang="en-US" sz="2000" dirty="0"/>
               <a:t>野田　蒼磨</a:t>
@@ -4160,6 +4150,210 @@
           <a:p>
             <a:pPr algn="l"/>
             <a:endParaRPr lang="en-US" altLang="ja-JP" sz="3500" dirty="0"/>
+          </a:p>
+        </p:txBody>
+      </p:sp>
+      <p:sp>
+        <p:nvSpPr>
+          <p:cNvPr id="10" name="字幕 2">
+            <a:extLst>
+              <a:ext uri="{FF2B5EF4-FFF2-40B4-BE49-F238E27FC236}">
+                <a16:creationId xmlns:a16="http://schemas.microsoft.com/office/drawing/2014/main" id="{2FFC13F5-055E-B35E-B1BB-56C3AF3AE2A9}"/>
+              </a:ext>
+            </a:extLst>
+          </p:cNvPr>
+          <p:cNvSpPr txBox="1">
+            <a:spLocks/>
+          </p:cNvSpPr>
+          <p:nvPr/>
+        </p:nvSpPr>
+        <p:spPr>
+          <a:xfrm>
+            <a:off x="245434" y="3239509"/>
+            <a:ext cx="5028529" cy="646331"/>
+          </a:xfrm>
+          <a:prstGeom prst="rect">
+            <a:avLst/>
+          </a:prstGeom>
+        </p:spPr>
+        <p:txBody>
+          <a:bodyPr vert="horz" lIns="91440" tIns="45720" rIns="91440" bIns="45720" rtlCol="0">
+            <a:normAutofit/>
+          </a:bodyPr>
+          <a:lstStyle>
+            <a:lvl1pPr marL="0" indent="0" algn="ctr" defTabSz="914400" rtl="0" eaLnBrk="1" latinLnBrk="0" hangingPunct="1">
+              <a:lnSpc>
+                <a:spcPct val="90000"/>
+              </a:lnSpc>
+              <a:spcBef>
+                <a:spcPts val="1000"/>
+              </a:spcBef>
+              <a:buFont typeface="Arial" panose="020B0604020202020204" pitchFamily="34" charset="0"/>
+              <a:buNone/>
+              <a:defRPr kumimoji="1" sz="2400" kern="1200">
+                <a:solidFill>
+                  <a:schemeClr val="tx1"/>
+                </a:solidFill>
+                <a:latin typeface="+mn-lt"/>
+                <a:ea typeface="+mn-ea"/>
+                <a:cs typeface="+mn-cs"/>
+              </a:defRPr>
+            </a:lvl1pPr>
+            <a:lvl2pPr marL="457200" indent="0" algn="ctr" defTabSz="914400" rtl="0" eaLnBrk="1" latinLnBrk="0" hangingPunct="1">
+              <a:lnSpc>
+                <a:spcPct val="90000"/>
+              </a:lnSpc>
+              <a:spcBef>
+                <a:spcPts val="500"/>
+              </a:spcBef>
+              <a:buFont typeface="Arial" panose="020B0604020202020204" pitchFamily="34" charset="0"/>
+              <a:buNone/>
+              <a:defRPr kumimoji="1" sz="2000" kern="1200">
+                <a:solidFill>
+                  <a:schemeClr val="tx1"/>
+                </a:solidFill>
+                <a:latin typeface="+mn-lt"/>
+                <a:ea typeface="+mn-ea"/>
+                <a:cs typeface="+mn-cs"/>
+              </a:defRPr>
+            </a:lvl2pPr>
+            <a:lvl3pPr marL="914400" indent="0" algn="ctr" defTabSz="914400" rtl="0" eaLnBrk="1" latinLnBrk="0" hangingPunct="1">
+              <a:lnSpc>
+                <a:spcPct val="90000"/>
+              </a:lnSpc>
+              <a:spcBef>
+                <a:spcPts val="500"/>
+              </a:spcBef>
+              <a:buFont typeface="Arial" panose="020B0604020202020204" pitchFamily="34" charset="0"/>
+              <a:buNone/>
+              <a:defRPr kumimoji="1" sz="1800" kern="1200">
+                <a:solidFill>
+                  <a:schemeClr val="tx1"/>
+                </a:solidFill>
+                <a:latin typeface="+mn-lt"/>
+                <a:ea typeface="+mn-ea"/>
+                <a:cs typeface="+mn-cs"/>
+              </a:defRPr>
+            </a:lvl3pPr>
+            <a:lvl4pPr marL="1371600" indent="0" algn="ctr" defTabSz="914400" rtl="0" eaLnBrk="1" latinLnBrk="0" hangingPunct="1">
+              <a:lnSpc>
+                <a:spcPct val="90000"/>
+              </a:lnSpc>
+              <a:spcBef>
+                <a:spcPts val="500"/>
+              </a:spcBef>
+              <a:buFont typeface="Arial" panose="020B0604020202020204" pitchFamily="34" charset="0"/>
+              <a:buNone/>
+              <a:defRPr kumimoji="1" sz="1600" kern="1200">
+                <a:solidFill>
+                  <a:schemeClr val="tx1"/>
+                </a:solidFill>
+                <a:latin typeface="+mn-lt"/>
+                <a:ea typeface="+mn-ea"/>
+                <a:cs typeface="+mn-cs"/>
+              </a:defRPr>
+            </a:lvl4pPr>
+            <a:lvl5pPr marL="1828800" indent="0" algn="ctr" defTabSz="914400" rtl="0" eaLnBrk="1" latinLnBrk="0" hangingPunct="1">
+              <a:lnSpc>
+                <a:spcPct val="90000"/>
+              </a:lnSpc>
+              <a:spcBef>
+                <a:spcPts val="500"/>
+              </a:spcBef>
+              <a:buFont typeface="Arial" panose="020B0604020202020204" pitchFamily="34" charset="0"/>
+              <a:buNone/>
+              <a:defRPr kumimoji="1" sz="1600" kern="1200">
+                <a:solidFill>
+                  <a:schemeClr val="tx1"/>
+                </a:solidFill>
+                <a:latin typeface="+mn-lt"/>
+                <a:ea typeface="+mn-ea"/>
+                <a:cs typeface="+mn-cs"/>
+              </a:defRPr>
+            </a:lvl5pPr>
+            <a:lvl6pPr marL="2286000" indent="0" algn="ctr" defTabSz="914400" rtl="0" eaLnBrk="1" latinLnBrk="0" hangingPunct="1">
+              <a:lnSpc>
+                <a:spcPct val="90000"/>
+              </a:lnSpc>
+              <a:spcBef>
+                <a:spcPts val="500"/>
+              </a:spcBef>
+              <a:buFont typeface="Arial" panose="020B0604020202020204" pitchFamily="34" charset="0"/>
+              <a:buNone/>
+              <a:defRPr kumimoji="1" sz="1600" kern="1200">
+                <a:solidFill>
+                  <a:schemeClr val="tx1"/>
+                </a:solidFill>
+                <a:latin typeface="+mn-lt"/>
+                <a:ea typeface="+mn-ea"/>
+                <a:cs typeface="+mn-cs"/>
+              </a:defRPr>
+            </a:lvl6pPr>
+            <a:lvl7pPr marL="2743200" indent="0" algn="ctr" defTabSz="914400" rtl="0" eaLnBrk="1" latinLnBrk="0" hangingPunct="1">
+              <a:lnSpc>
+                <a:spcPct val="90000"/>
+              </a:lnSpc>
+              <a:spcBef>
+                <a:spcPts val="500"/>
+              </a:spcBef>
+              <a:buFont typeface="Arial" panose="020B0604020202020204" pitchFamily="34" charset="0"/>
+              <a:buNone/>
+              <a:defRPr kumimoji="1" sz="1600" kern="1200">
+                <a:solidFill>
+                  <a:schemeClr val="tx1"/>
+                </a:solidFill>
+                <a:latin typeface="+mn-lt"/>
+                <a:ea typeface="+mn-ea"/>
+                <a:cs typeface="+mn-cs"/>
+              </a:defRPr>
+            </a:lvl7pPr>
+            <a:lvl8pPr marL="3200400" indent="0" algn="ctr" defTabSz="914400" rtl="0" eaLnBrk="1" latinLnBrk="0" hangingPunct="1">
+              <a:lnSpc>
+                <a:spcPct val="90000"/>
+              </a:lnSpc>
+              <a:spcBef>
+                <a:spcPts val="500"/>
+              </a:spcBef>
+              <a:buFont typeface="Arial" panose="020B0604020202020204" pitchFamily="34" charset="0"/>
+              <a:buNone/>
+              <a:defRPr kumimoji="1" sz="1600" kern="1200">
+                <a:solidFill>
+                  <a:schemeClr val="tx1"/>
+                </a:solidFill>
+                <a:latin typeface="+mn-lt"/>
+                <a:ea typeface="+mn-ea"/>
+                <a:cs typeface="+mn-cs"/>
+              </a:defRPr>
+            </a:lvl8pPr>
+            <a:lvl9pPr marL="3657600" indent="0" algn="ctr" defTabSz="914400" rtl="0" eaLnBrk="1" latinLnBrk="0" hangingPunct="1">
+              <a:lnSpc>
+                <a:spcPct val="90000"/>
+              </a:lnSpc>
+              <a:spcBef>
+                <a:spcPts val="500"/>
+              </a:spcBef>
+              <a:buFont typeface="Arial" panose="020B0604020202020204" pitchFamily="34" charset="0"/>
+              <a:buNone/>
+              <a:defRPr kumimoji="1" sz="1600" kern="1200">
+                <a:solidFill>
+                  <a:schemeClr val="tx1"/>
+                </a:solidFill>
+                <a:latin typeface="+mn-lt"/>
+                <a:ea typeface="+mn-ea"/>
+                <a:cs typeface="+mn-cs"/>
+              </a:defRPr>
+            </a:lvl9pPr>
+          </a:lstStyle>
+          <a:p>
+            <a:pPr algn="l"/>
+            <a:r>
+              <a:rPr lang="ja-JP" altLang="en-US" sz="3600" b="1" dirty="0"/>
+              <a:t>使用エンジン：</a:t>
+            </a:r>
+            <a:r>
+              <a:rPr lang="en-US" altLang="ja-JP" sz="3600" dirty="0"/>
+              <a:t>Unity</a:t>
+            </a:r>
           </a:p>
         </p:txBody>
       </p:sp>
@@ -4491,24 +4685,37 @@
         </p:nvSpPr>
         <p:spPr>
           <a:xfrm>
-            <a:off x="471055" y="175491"/>
-            <a:ext cx="11490036" cy="6465454"/>
+            <a:off x="379269" y="1229303"/>
+            <a:ext cx="6548004" cy="4201680"/>
           </a:xfrm>
         </p:spPr>
         <p:txBody>
           <a:bodyPr>
-            <a:normAutofit lnSpcReduction="10000"/>
+            <a:normAutofit/>
           </a:bodyPr>
           <a:lstStyle/>
           <a:p>
-            <a:pPr marL="0" indent="0">
-              <a:buNone/>
-            </a:pPr>
-            <a:r>
-              <a:rPr lang="ja-JP" altLang="en-US" sz="4000" b="1" dirty="0"/>
-              <a:t>ゲーム概要</a:t>
-            </a:r>
-            <a:endParaRPr lang="en-US" altLang="ja-JP" sz="4000" b="1" dirty="0"/>
+            <a:r>
+              <a:rPr lang="ja-JP" altLang="en-US" dirty="0"/>
+              <a:t>コントローラー</a:t>
+            </a:r>
+            <a:r>
+              <a:rPr lang="en-US" altLang="ja-JP" dirty="0"/>
+              <a:t>(</a:t>
+            </a:r>
+            <a:r>
+              <a:rPr lang="ja-JP" altLang="en-US" dirty="0"/>
+              <a:t>キーボード</a:t>
+            </a:r>
+            <a:r>
+              <a:rPr lang="en-US" altLang="ja-JP" dirty="0"/>
+              <a:t>)</a:t>
+            </a:r>
+            <a:r>
+              <a:rPr lang="ja-JP" altLang="en-US" dirty="0"/>
+              <a:t>で操作</a:t>
+            </a:r>
+            <a:endParaRPr lang="en-US" altLang="ja-JP" dirty="0"/>
           </a:p>
           <a:p>
             <a:r>
@@ -4534,9 +4741,10 @@
             <a:endParaRPr lang="en-US" altLang="ja-JP" dirty="0"/>
           </a:p>
           <a:p>
+            <a:pPr algn="just"/>
             <a:r>
               <a:rPr lang="ja-JP" altLang="en-US" dirty="0"/>
-              <a:t>プレイヤーを操作して鍵のかけらを集めて脱出する</a:t>
+              <a:t>鍵のかけらを集めて脱出する</a:t>
             </a:r>
             <a:r>
               <a:rPr lang="en-US" altLang="ja-JP" dirty="0"/>
@@ -4556,44 +4764,6 @@
               <a:rPr lang="ja-JP" altLang="en-US" dirty="0"/>
               <a:t>かけら数と残機数は常に画面内に表示</a:t>
             </a:r>
-          </a:p>
-          <a:p>
-            <a:r>
-              <a:rPr lang="ja-JP" altLang="en-US" dirty="0"/>
-              <a:t>後半になるにつれて難易度が上がる</a:t>
-            </a:r>
-            <a:r>
-              <a:rPr lang="en-US" altLang="ja-JP" dirty="0"/>
-              <a:t>(</a:t>
-            </a:r>
-            <a:r>
-              <a:rPr lang="ja-JP" altLang="en-US" dirty="0"/>
-              <a:t>かけら取得数に応じて敵の数が増える</a:t>
-            </a:r>
-            <a:r>
-              <a:rPr lang="en-US" altLang="ja-JP" dirty="0"/>
-              <a:t>)</a:t>
-            </a:r>
-          </a:p>
-          <a:p>
-            <a:r>
-              <a:rPr lang="ja-JP" altLang="en-US" dirty="0"/>
-              <a:t>敵はマップ内を徘徊してプレイヤーに近づいたときにプレイヤーを追従する</a:t>
-            </a:r>
-            <a:endParaRPr lang="en-US" altLang="ja-JP" dirty="0"/>
-          </a:p>
-          <a:p>
-            <a:r>
-              <a:rPr lang="ja-JP" altLang="en-US" dirty="0"/>
-              <a:t>追従は索敵範囲外に出たら徘徊状態に戻る</a:t>
-            </a:r>
-            <a:endParaRPr lang="en-US" altLang="ja-JP" dirty="0"/>
-          </a:p>
-          <a:p>
-            <a:r>
-              <a:rPr lang="ja-JP" altLang="en-US" dirty="0"/>
-              <a:t>敵につかまると初期地点に戻されて残機が減りかけら数が引き継がれる</a:t>
-            </a:r>
             <a:endParaRPr lang="en-US" altLang="ja-JP" dirty="0"/>
           </a:p>
           <a:p>
@@ -4611,38 +4781,415 @@
             </a:r>
             <a:endParaRPr lang="en-US" altLang="ja-JP" dirty="0"/>
           </a:p>
-          <a:p>
-            <a:r>
-              <a:rPr lang="ja-JP" altLang="en-US" dirty="0"/>
-              <a:t>コントローラー</a:t>
-            </a:r>
-            <a:r>
-              <a:rPr lang="en-US" altLang="ja-JP" dirty="0"/>
-              <a:t>(</a:t>
-            </a:r>
-            <a:r>
-              <a:rPr lang="ja-JP" altLang="en-US" dirty="0"/>
-              <a:t>キーボード</a:t>
-            </a:r>
-            <a:r>
-              <a:rPr lang="en-US" altLang="ja-JP" dirty="0"/>
-              <a:t>)</a:t>
-            </a:r>
-            <a:r>
-              <a:rPr lang="ja-JP" altLang="en-US" dirty="0"/>
-              <a:t>で操作</a:t>
-            </a:r>
-            <a:endParaRPr lang="ja-JP" altLang="en-US" sz="1050" dirty="0"/>
-          </a:p>
-          <a:p>
-            <a:endParaRPr kumimoji="1" lang="ja-JP" altLang="en-US" dirty="0"/>
-          </a:p>
-        </p:txBody>
-      </p:sp>
+        </p:txBody>
+      </p:sp>
+      <p:pic>
+        <p:nvPicPr>
+          <p:cNvPr id="2" name="図 1" descr="Dark deception chapter 1 - YouTube">
+            <a:extLst>
+              <a:ext uri="{FF2B5EF4-FFF2-40B4-BE49-F238E27FC236}">
+                <a16:creationId xmlns:a16="http://schemas.microsoft.com/office/drawing/2014/main" id="{BA6BFF1A-CFCB-2ACD-8CEE-D2B0133BF843}"/>
+              </a:ext>
+            </a:extLst>
+          </p:cNvPr>
+          <p:cNvPicPr>
+            <a:picLocks noChangeAspect="1"/>
+          </p:cNvPicPr>
+          <p:nvPr/>
+        </p:nvPicPr>
+        <p:blipFill>
+          <a:blip r:embed="rId2"/>
+          <a:stretch>
+            <a:fillRect/>
+          </a:stretch>
+        </p:blipFill>
+        <p:spPr>
+          <a:xfrm>
+            <a:off x="7071463" y="393988"/>
+            <a:ext cx="4855762" cy="2731366"/>
+          </a:xfrm>
+          <a:prstGeom prst="rect">
+            <a:avLst/>
+          </a:prstGeom>
+        </p:spPr>
+      </p:pic>
+      <p:sp>
+        <p:nvSpPr>
+          <p:cNvPr id="4" name="コンテンツ プレースホルダー 2">
+            <a:extLst>
+              <a:ext uri="{FF2B5EF4-FFF2-40B4-BE49-F238E27FC236}">
+                <a16:creationId xmlns:a16="http://schemas.microsoft.com/office/drawing/2014/main" id="{6A04CECC-F658-A3F1-6B48-EC0D114FD097}"/>
+              </a:ext>
+            </a:extLst>
+          </p:cNvPr>
+          <p:cNvSpPr txBox="1">
+            <a:spLocks/>
+          </p:cNvSpPr>
+          <p:nvPr/>
+        </p:nvSpPr>
+        <p:spPr>
+          <a:xfrm>
+            <a:off x="297424" y="310283"/>
+            <a:ext cx="3831230" cy="641061"/>
+          </a:xfrm>
+          <a:prstGeom prst="rect">
+            <a:avLst/>
+          </a:prstGeom>
+        </p:spPr>
+        <p:txBody>
+          <a:bodyPr vert="horz" lIns="91440" tIns="45720" rIns="91440" bIns="45720" rtlCol="0">
+            <a:normAutofit fontScale="92500" lnSpcReduction="10000"/>
+          </a:bodyPr>
+          <a:lstStyle>
+            <a:lvl1pPr marL="228600" indent="-228600" algn="l" defTabSz="914400" rtl="0" eaLnBrk="1" latinLnBrk="0" hangingPunct="1">
+              <a:lnSpc>
+                <a:spcPct val="90000"/>
+              </a:lnSpc>
+              <a:spcBef>
+                <a:spcPts val="1000"/>
+              </a:spcBef>
+              <a:buFont typeface="Arial" panose="020B0604020202020204" pitchFamily="34" charset="0"/>
+              <a:buChar char="•"/>
+              <a:defRPr kumimoji="1" sz="2800" kern="1200">
+                <a:solidFill>
+                  <a:schemeClr val="tx1"/>
+                </a:solidFill>
+                <a:latin typeface="+mn-lt"/>
+                <a:ea typeface="+mn-ea"/>
+                <a:cs typeface="+mn-cs"/>
+              </a:defRPr>
+            </a:lvl1pPr>
+            <a:lvl2pPr marL="685800" indent="-228600" algn="l" defTabSz="914400" rtl="0" eaLnBrk="1" latinLnBrk="0" hangingPunct="1">
+              <a:lnSpc>
+                <a:spcPct val="90000"/>
+              </a:lnSpc>
+              <a:spcBef>
+                <a:spcPts val="500"/>
+              </a:spcBef>
+              <a:buFont typeface="Arial" panose="020B0604020202020204" pitchFamily="34" charset="0"/>
+              <a:buChar char="•"/>
+              <a:defRPr kumimoji="1" sz="2400" kern="1200">
+                <a:solidFill>
+                  <a:schemeClr val="tx1"/>
+                </a:solidFill>
+                <a:latin typeface="+mn-lt"/>
+                <a:ea typeface="+mn-ea"/>
+                <a:cs typeface="+mn-cs"/>
+              </a:defRPr>
+            </a:lvl2pPr>
+            <a:lvl3pPr marL="1143000" indent="-228600" algn="l" defTabSz="914400" rtl="0" eaLnBrk="1" latinLnBrk="0" hangingPunct="1">
+              <a:lnSpc>
+                <a:spcPct val="90000"/>
+              </a:lnSpc>
+              <a:spcBef>
+                <a:spcPts val="500"/>
+              </a:spcBef>
+              <a:buFont typeface="Arial" panose="020B0604020202020204" pitchFamily="34" charset="0"/>
+              <a:buChar char="•"/>
+              <a:defRPr kumimoji="1" sz="2000" kern="1200">
+                <a:solidFill>
+                  <a:schemeClr val="tx1"/>
+                </a:solidFill>
+                <a:latin typeface="+mn-lt"/>
+                <a:ea typeface="+mn-ea"/>
+                <a:cs typeface="+mn-cs"/>
+              </a:defRPr>
+            </a:lvl3pPr>
+            <a:lvl4pPr marL="1600200" indent="-228600" algn="l" defTabSz="914400" rtl="0" eaLnBrk="1" latinLnBrk="0" hangingPunct="1">
+              <a:lnSpc>
+                <a:spcPct val="90000"/>
+              </a:lnSpc>
+              <a:spcBef>
+                <a:spcPts val="500"/>
+              </a:spcBef>
+              <a:buFont typeface="Arial" panose="020B0604020202020204" pitchFamily="34" charset="0"/>
+              <a:buChar char="•"/>
+              <a:defRPr kumimoji="1" sz="1800" kern="1200">
+                <a:solidFill>
+                  <a:schemeClr val="tx1"/>
+                </a:solidFill>
+                <a:latin typeface="+mn-lt"/>
+                <a:ea typeface="+mn-ea"/>
+                <a:cs typeface="+mn-cs"/>
+              </a:defRPr>
+            </a:lvl4pPr>
+            <a:lvl5pPr marL="2057400" indent="-228600" algn="l" defTabSz="914400" rtl="0" eaLnBrk="1" latinLnBrk="0" hangingPunct="1">
+              <a:lnSpc>
+                <a:spcPct val="90000"/>
+              </a:lnSpc>
+              <a:spcBef>
+                <a:spcPts val="500"/>
+              </a:spcBef>
+              <a:buFont typeface="Arial" panose="020B0604020202020204" pitchFamily="34" charset="0"/>
+              <a:buChar char="•"/>
+              <a:defRPr kumimoji="1" sz="1800" kern="1200">
+                <a:solidFill>
+                  <a:schemeClr val="tx1"/>
+                </a:solidFill>
+                <a:latin typeface="+mn-lt"/>
+                <a:ea typeface="+mn-ea"/>
+                <a:cs typeface="+mn-cs"/>
+              </a:defRPr>
+            </a:lvl5pPr>
+            <a:lvl6pPr marL="2514600" indent="-228600" algn="l" defTabSz="914400" rtl="0" eaLnBrk="1" latinLnBrk="0" hangingPunct="1">
+              <a:lnSpc>
+                <a:spcPct val="90000"/>
+              </a:lnSpc>
+              <a:spcBef>
+                <a:spcPts val="500"/>
+              </a:spcBef>
+              <a:buFont typeface="Arial" panose="020B0604020202020204" pitchFamily="34" charset="0"/>
+              <a:buChar char="•"/>
+              <a:defRPr kumimoji="1" sz="1800" kern="1200">
+                <a:solidFill>
+                  <a:schemeClr val="tx1"/>
+                </a:solidFill>
+                <a:latin typeface="+mn-lt"/>
+                <a:ea typeface="+mn-ea"/>
+                <a:cs typeface="+mn-cs"/>
+              </a:defRPr>
+            </a:lvl6pPr>
+            <a:lvl7pPr marL="2971800" indent="-228600" algn="l" defTabSz="914400" rtl="0" eaLnBrk="1" latinLnBrk="0" hangingPunct="1">
+              <a:lnSpc>
+                <a:spcPct val="90000"/>
+              </a:lnSpc>
+              <a:spcBef>
+                <a:spcPts val="500"/>
+              </a:spcBef>
+              <a:buFont typeface="Arial" panose="020B0604020202020204" pitchFamily="34" charset="0"/>
+              <a:buChar char="•"/>
+              <a:defRPr kumimoji="1" sz="1800" kern="1200">
+                <a:solidFill>
+                  <a:schemeClr val="tx1"/>
+                </a:solidFill>
+                <a:latin typeface="+mn-lt"/>
+                <a:ea typeface="+mn-ea"/>
+                <a:cs typeface="+mn-cs"/>
+              </a:defRPr>
+            </a:lvl7pPr>
+            <a:lvl8pPr marL="3429000" indent="-228600" algn="l" defTabSz="914400" rtl="0" eaLnBrk="1" latinLnBrk="0" hangingPunct="1">
+              <a:lnSpc>
+                <a:spcPct val="90000"/>
+              </a:lnSpc>
+              <a:spcBef>
+                <a:spcPts val="500"/>
+              </a:spcBef>
+              <a:buFont typeface="Arial" panose="020B0604020202020204" pitchFamily="34" charset="0"/>
+              <a:buChar char="•"/>
+              <a:defRPr kumimoji="1" sz="1800" kern="1200">
+                <a:solidFill>
+                  <a:schemeClr val="tx1"/>
+                </a:solidFill>
+                <a:latin typeface="+mn-lt"/>
+                <a:ea typeface="+mn-ea"/>
+                <a:cs typeface="+mn-cs"/>
+              </a:defRPr>
+            </a:lvl8pPr>
+            <a:lvl9pPr marL="3886200" indent="-228600" algn="l" defTabSz="914400" rtl="0" eaLnBrk="1" latinLnBrk="0" hangingPunct="1">
+              <a:lnSpc>
+                <a:spcPct val="90000"/>
+              </a:lnSpc>
+              <a:spcBef>
+                <a:spcPts val="500"/>
+              </a:spcBef>
+              <a:buFont typeface="Arial" panose="020B0604020202020204" pitchFamily="34" charset="0"/>
+              <a:buChar char="•"/>
+              <a:defRPr kumimoji="1" sz="1800" kern="1200">
+                <a:solidFill>
+                  <a:schemeClr val="tx1"/>
+                </a:solidFill>
+                <a:latin typeface="+mn-lt"/>
+                <a:ea typeface="+mn-ea"/>
+                <a:cs typeface="+mn-cs"/>
+              </a:defRPr>
+            </a:lvl9pPr>
+          </a:lstStyle>
+          <a:p>
+            <a:pPr marL="0" indent="0">
+              <a:buNone/>
+            </a:pPr>
+            <a:r>
+              <a:rPr lang="ja-JP" altLang="en-US" sz="4400" b="1" dirty="0"/>
+              <a:t>ゲーム概要</a:t>
+            </a:r>
+          </a:p>
+        </p:txBody>
+      </p:sp>
+      <p:pic>
+        <p:nvPicPr>
+          <p:cNvPr id="6" name="図 5" descr="Dark Deception chapter 1 full playthrough no commentary died one time ...">
+            <a:extLst>
+              <a:ext uri="{FF2B5EF4-FFF2-40B4-BE49-F238E27FC236}">
+                <a16:creationId xmlns:a16="http://schemas.microsoft.com/office/drawing/2014/main" id="{24CFF4E3-9353-78DE-CD15-B15B095D383E}"/>
+              </a:ext>
+            </a:extLst>
+          </p:cNvPr>
+          <p:cNvPicPr>
+            <a:picLocks noChangeAspect="1"/>
+          </p:cNvPicPr>
+          <p:nvPr/>
+        </p:nvPicPr>
+        <p:blipFill>
+          <a:blip r:embed="rId3"/>
+          <a:stretch>
+            <a:fillRect/>
+          </a:stretch>
+        </p:blipFill>
+        <p:spPr>
+          <a:xfrm>
+            <a:off x="7071463" y="3642592"/>
+            <a:ext cx="5015857" cy="2821420"/>
+          </a:xfrm>
+          <a:prstGeom prst="rect">
+            <a:avLst/>
+          </a:prstGeom>
+        </p:spPr>
+      </p:pic>
     </p:spTree>
     <p:extLst>
       <p:ext uri="{BB962C8B-B14F-4D97-AF65-F5344CB8AC3E}">
         <p14:creationId xmlns:p14="http://schemas.microsoft.com/office/powerpoint/2010/main" val="3795403796"/>
+      </p:ext>
+    </p:extLst>
+  </p:cSld>
+  <p:clrMapOvr>
+    <a:masterClrMapping/>
+  </p:clrMapOvr>
+</p:sld>
+</file>
+
+<file path=ppt/slides/slide5.xml><?xml version="1.0" encoding="utf-8"?>
+<p:sld xmlns:a="http://schemas.openxmlformats.org/drawingml/2006/main" xmlns:r="http://schemas.openxmlformats.org/officeDocument/2006/relationships" xmlns:p="http://schemas.openxmlformats.org/presentationml/2006/main">
+  <p:cSld>
+    <p:spTree>
+      <p:nvGrpSpPr>
+        <p:cNvPr id="1" name=""/>
+        <p:cNvGrpSpPr/>
+        <p:nvPr/>
+      </p:nvGrpSpPr>
+      <p:grpSpPr>
+        <a:xfrm>
+          <a:off x="0" y="0"/>
+          <a:ext cx="0" cy="0"/>
+          <a:chOff x="0" y="0"/>
+          <a:chExt cx="0" cy="0"/>
+        </a:xfrm>
+      </p:grpSpPr>
+      <p:sp>
+        <p:nvSpPr>
+          <p:cNvPr id="3" name="コンテンツ プレースホルダー 2">
+            <a:extLst>
+              <a:ext uri="{FF2B5EF4-FFF2-40B4-BE49-F238E27FC236}">
+                <a16:creationId xmlns:a16="http://schemas.microsoft.com/office/drawing/2014/main" id="{4AD0BFBE-994F-C319-8EDB-682EF4110675}"/>
+              </a:ext>
+            </a:extLst>
+          </p:cNvPr>
+          <p:cNvSpPr>
+            <a:spLocks noGrp="1"/>
+          </p:cNvSpPr>
+          <p:nvPr>
+            <p:ph idx="1"/>
+          </p:nvPr>
+        </p:nvSpPr>
+        <p:spPr>
+          <a:xfrm>
+            <a:off x="101600" y="858981"/>
+            <a:ext cx="6251575" cy="4941455"/>
+          </a:xfrm>
+        </p:spPr>
+        <p:txBody>
+          <a:bodyPr anchor="ctr">
+            <a:normAutofit/>
+          </a:bodyPr>
+          <a:lstStyle/>
+          <a:p>
+            <a:r>
+              <a:rPr lang="ja-JP" altLang="en-US" dirty="0"/>
+              <a:t>後半になるにつれて難易度が上がる</a:t>
+            </a:r>
+            <a:endParaRPr lang="en-US" altLang="ja-JP" dirty="0"/>
+          </a:p>
+          <a:p>
+            <a:pPr marL="0" indent="0">
+              <a:buNone/>
+            </a:pPr>
+            <a:r>
+              <a:rPr lang="ja-JP" altLang="en-US" dirty="0"/>
+              <a:t>→かけら取得数に応じて敵の数が増</a:t>
+            </a:r>
+            <a:r>
+              <a:rPr lang="en-US" altLang="ja-JP" dirty="0"/>
+              <a:t>    </a:t>
+            </a:r>
+            <a:r>
+              <a:rPr lang="ja-JP" altLang="en-US" dirty="0"/>
+              <a:t>　　　　　　　　　　　　　　　　　　　　　　　　　　　　　える</a:t>
+            </a:r>
+            <a:endParaRPr lang="en-US" altLang="ja-JP" dirty="0"/>
+          </a:p>
+          <a:p>
+            <a:r>
+              <a:rPr lang="ja-JP" altLang="en-US" dirty="0"/>
+              <a:t>敵はマップ内を徘徊してプレイヤーに近づいたときにプレイヤーを追従する</a:t>
+            </a:r>
+            <a:endParaRPr lang="en-US" altLang="ja-JP" dirty="0"/>
+          </a:p>
+          <a:p>
+            <a:r>
+              <a:rPr lang="ja-JP" altLang="en-US" dirty="0"/>
+              <a:t>追従は索敵範囲外に出たら徘徊状態に戻る</a:t>
+            </a:r>
+            <a:endParaRPr lang="en-US" altLang="ja-JP" dirty="0"/>
+          </a:p>
+          <a:p>
+            <a:r>
+              <a:rPr lang="ja-JP" altLang="en-US" dirty="0"/>
+              <a:t>敵につかまるとロビーに戻されて残機が減りかけら数が引き継がれる</a:t>
+            </a:r>
+            <a:endParaRPr kumimoji="1" lang="ja-JP" altLang="en-US" dirty="0"/>
+          </a:p>
+        </p:txBody>
+      </p:sp>
+      <p:pic>
+        <p:nvPicPr>
+          <p:cNvPr id="5" name="図 4">
+            <a:extLst>
+              <a:ext uri="{FF2B5EF4-FFF2-40B4-BE49-F238E27FC236}">
+                <a16:creationId xmlns:a16="http://schemas.microsoft.com/office/drawing/2014/main" id="{D808FB04-C93B-41C3-D76C-E48B3968F303}"/>
+              </a:ext>
+            </a:extLst>
+          </p:cNvPr>
+          <p:cNvPicPr>
+            <a:picLocks noChangeAspect="1"/>
+          </p:cNvPicPr>
+          <p:nvPr/>
+        </p:nvPicPr>
+        <p:blipFill>
+          <a:blip r:embed="rId2">
+            <a:extLst>
+              <a:ext uri="{28A0092B-C50C-407E-A947-70E740481C1C}">
+                <a14:useLocalDpi xmlns:a14="http://schemas.microsoft.com/office/drawing/2010/main" val="0"/>
+              </a:ext>
+            </a:extLst>
+          </a:blip>
+          <a:stretch>
+            <a:fillRect/>
+          </a:stretch>
+        </p:blipFill>
+        <p:spPr>
+          <a:xfrm>
+            <a:off x="6353175" y="1614775"/>
+            <a:ext cx="5838825" cy="3281837"/>
+          </a:xfrm>
+          <a:prstGeom prst="rect">
+            <a:avLst/>
+          </a:prstGeom>
+        </p:spPr>
+      </p:pic>
+    </p:spTree>
+    <p:extLst>
+      <p:ext uri="{BB962C8B-B14F-4D97-AF65-F5344CB8AC3E}">
+        <p14:creationId xmlns:p14="http://schemas.microsoft.com/office/powerpoint/2010/main" val="4029283392"/>
       </p:ext>
     </p:extLst>
   </p:cSld>

--- a/SewerEscape企画書.pptx
+++ b/SewerEscape企画書.pptx
@@ -263,7 +263,7 @@
           <a:p>
             <a:fld id="{2E7489E2-24D5-4E87-8DBE-89F167604D51}" type="datetimeFigureOut">
               <a:rPr kumimoji="1" lang="ja-JP" altLang="en-US" smtClean="0"/>
-              <a:t>2026/9/15</a:t>
+              <a:t>2026/10/8</a:t>
             </a:fld>
             <a:endParaRPr kumimoji="1" lang="ja-JP" altLang="en-US"/>
           </a:p>
@@ -493,7 +493,7 @@
           <a:p>
             <a:fld id="{2E7489E2-24D5-4E87-8DBE-89F167604D51}" type="datetimeFigureOut">
               <a:rPr kumimoji="1" lang="ja-JP" altLang="en-US" smtClean="0"/>
-              <a:t>2026/9/15</a:t>
+              <a:t>2026/10/8</a:t>
             </a:fld>
             <a:endParaRPr kumimoji="1" lang="ja-JP" altLang="en-US"/>
           </a:p>
@@ -733,7 +733,7 @@
           <a:p>
             <a:fld id="{2E7489E2-24D5-4E87-8DBE-89F167604D51}" type="datetimeFigureOut">
               <a:rPr kumimoji="1" lang="ja-JP" altLang="en-US" smtClean="0"/>
-              <a:t>2026/9/15</a:t>
+              <a:t>2026/10/8</a:t>
             </a:fld>
             <a:endParaRPr kumimoji="1" lang="ja-JP" altLang="en-US"/>
           </a:p>
@@ -963,7 +963,7 @@
           <a:p>
             <a:fld id="{2E7489E2-24D5-4E87-8DBE-89F167604D51}" type="datetimeFigureOut">
               <a:rPr kumimoji="1" lang="ja-JP" altLang="en-US" smtClean="0"/>
-              <a:t>2026/9/15</a:t>
+              <a:t>2026/10/8</a:t>
             </a:fld>
             <a:endParaRPr kumimoji="1" lang="ja-JP" altLang="en-US"/>
           </a:p>
@@ -1238,7 +1238,7 @@
           <a:p>
             <a:fld id="{2E7489E2-24D5-4E87-8DBE-89F167604D51}" type="datetimeFigureOut">
               <a:rPr kumimoji="1" lang="ja-JP" altLang="en-US" smtClean="0"/>
-              <a:t>2026/9/15</a:t>
+              <a:t>2026/10/8</a:t>
             </a:fld>
             <a:endParaRPr kumimoji="1" lang="ja-JP" altLang="en-US"/>
           </a:p>
@@ -1567,7 +1567,7 @@
           <a:p>
             <a:fld id="{2E7489E2-24D5-4E87-8DBE-89F167604D51}" type="datetimeFigureOut">
               <a:rPr kumimoji="1" lang="ja-JP" altLang="en-US" smtClean="0"/>
-              <a:t>2026/9/15</a:t>
+              <a:t>2026/10/8</a:t>
             </a:fld>
             <a:endParaRPr kumimoji="1" lang="ja-JP" altLang="en-US"/>
           </a:p>
@@ -2043,7 +2043,7 @@
           <a:p>
             <a:fld id="{2E7489E2-24D5-4E87-8DBE-89F167604D51}" type="datetimeFigureOut">
               <a:rPr kumimoji="1" lang="ja-JP" altLang="en-US" smtClean="0"/>
-              <a:t>2026/9/15</a:t>
+              <a:t>2026/10/8</a:t>
             </a:fld>
             <a:endParaRPr kumimoji="1" lang="ja-JP" altLang="en-US"/>
           </a:p>
@@ -2184,7 +2184,7 @@
           <a:p>
             <a:fld id="{2E7489E2-24D5-4E87-8DBE-89F167604D51}" type="datetimeFigureOut">
               <a:rPr kumimoji="1" lang="ja-JP" altLang="en-US" smtClean="0"/>
-              <a:t>2026/9/15</a:t>
+              <a:t>2026/10/8</a:t>
             </a:fld>
             <a:endParaRPr kumimoji="1" lang="ja-JP" altLang="en-US"/>
           </a:p>
@@ -2297,7 +2297,7 @@
           <a:p>
             <a:fld id="{2E7489E2-24D5-4E87-8DBE-89F167604D51}" type="datetimeFigureOut">
               <a:rPr kumimoji="1" lang="ja-JP" altLang="en-US" smtClean="0"/>
-              <a:t>2026/9/15</a:t>
+              <a:t>2026/10/8</a:t>
             </a:fld>
             <a:endParaRPr kumimoji="1" lang="ja-JP" altLang="en-US"/>
           </a:p>
@@ -2640,7 +2640,7 @@
           <a:p>
             <a:fld id="{2E7489E2-24D5-4E87-8DBE-89F167604D51}" type="datetimeFigureOut">
               <a:rPr kumimoji="1" lang="ja-JP" altLang="en-US" smtClean="0"/>
-              <a:t>2026/9/15</a:t>
+              <a:t>2026/10/8</a:t>
             </a:fld>
             <a:endParaRPr kumimoji="1" lang="ja-JP" altLang="en-US"/>
           </a:p>
@@ -2928,7 +2928,7 @@
           <a:p>
             <a:fld id="{2E7489E2-24D5-4E87-8DBE-89F167604D51}" type="datetimeFigureOut">
               <a:rPr kumimoji="1" lang="ja-JP" altLang="en-US" smtClean="0"/>
-              <a:t>2026/9/15</a:t>
+              <a:t>2026/10/8</a:t>
             </a:fld>
             <a:endParaRPr kumimoji="1" lang="ja-JP" altLang="en-US"/>
           </a:p>
@@ -3201,7 +3201,7 @@
           <a:p>
             <a:fld id="{2E7489E2-24D5-4E87-8DBE-89F167604D51}" type="datetimeFigureOut">
               <a:rPr kumimoji="1" lang="ja-JP" altLang="en-US" smtClean="0"/>
-              <a:t>2026/9/15</a:t>
+              <a:t>2026/10/8</a:t>
             </a:fld>
             <a:endParaRPr kumimoji="1" lang="ja-JP" altLang="en-US"/>
           </a:p>
@@ -4697,23 +4697,15 @@
           <a:p>
             <a:r>
               <a:rPr lang="ja-JP" altLang="en-US" dirty="0"/>
-              <a:t>コントローラー</a:t>
+              <a:t>パッドかキーボード</a:t>
             </a:r>
             <a:r>
               <a:rPr lang="en-US" altLang="ja-JP" dirty="0"/>
-              <a:t>(</a:t>
+              <a:t>&amp;</a:t>
             </a:r>
             <a:r>
               <a:rPr lang="ja-JP" altLang="en-US" dirty="0"/>
-              <a:t>キーボード</a:t>
-            </a:r>
-            <a:r>
-              <a:rPr lang="en-US" altLang="ja-JP" dirty="0"/>
-              <a:t>)</a:t>
-            </a:r>
-            <a:r>
-              <a:rPr lang="ja-JP" altLang="en-US" dirty="0"/>
-              <a:t>で操作</a:t>
+              <a:t>マウスで操作</a:t>
             </a:r>
             <a:endParaRPr lang="en-US" altLang="ja-JP" dirty="0"/>
           </a:p>
@@ -5123,7 +5115,15 @@
             </a:r>
             <a:r>
               <a:rPr lang="ja-JP" altLang="en-US" dirty="0"/>
-              <a:t>　　　　　　　　　　　　　　　　　　　　　　　　　　　　　える</a:t>
+              <a:t>　　　　　　　　　　　　　　　　　　　　　　　　　　　　　える（最大</a:t>
+            </a:r>
+            <a:r>
+              <a:rPr lang="en-US" altLang="ja-JP" dirty="0"/>
+              <a:t>4</a:t>
+            </a:r>
+            <a:r>
+              <a:rPr lang="ja-JP" altLang="en-US" dirty="0"/>
+              <a:t>体）</a:t>
             </a:r>
             <a:endParaRPr lang="en-US" altLang="ja-JP" dirty="0"/>
           </a:p>

--- a/SewerEscape企画書.pptx
+++ b/SewerEscape企画書.pptx
@@ -2,14 +2,14 @@
 <file path=ppt/presentation.xml><?xml version="1.0" encoding="utf-8"?>
 <p:presentation xmlns:a="http://schemas.openxmlformats.org/drawingml/2006/main" xmlns:r="http://schemas.openxmlformats.org/officeDocument/2006/relationships" xmlns:p="http://schemas.openxmlformats.org/presentationml/2006/main" saveSubsetFonts="1">
   <p:sldMasterIdLst>
-    <p:sldMasterId id="2147483648" r:id="rId1"/>
+    <p:sldMasterId id="2147483648" r:id="rId4"/>
   </p:sldMasterIdLst>
   <p:sldIdLst>
-    <p:sldId id="256" r:id="rId2"/>
-    <p:sldId id="257" r:id="rId3"/>
-    <p:sldId id="258" r:id="rId4"/>
-    <p:sldId id="259" r:id="rId5"/>
-    <p:sldId id="260" r:id="rId6"/>
+    <p:sldId id="256" r:id="rId5"/>
+    <p:sldId id="257" r:id="rId6"/>
+    <p:sldId id="258" r:id="rId7"/>
+    <p:sldId id="259" r:id="rId8"/>
+    <p:sldId id="260" r:id="rId9"/>
   </p:sldIdLst>
   <p:sldSz cx="12192000" cy="6858000"/>
   <p:notesSz cx="6858000" cy="9144000"/>
@@ -116,6 +116,43 @@
 </p:presentation>
 </file>
 
+<file path=ppt/revisionInfo.xml><?xml version="1.0" encoding="utf-8"?>
+<p1510:revInfo xmlns:a="http://schemas.openxmlformats.org/drawingml/2006/main" xmlns:r="http://schemas.openxmlformats.org/officeDocument/2006/relationships" xmlns:p1510="http://schemas.microsoft.com/office/powerpoint/2015/10/main">
+  <p1510:revLst>
+    <p1510:client id="{00000000-0000-0000-0000-000000000000}" v="43" dt="2026-10-08T21:13:47.015"/>
+  </p1510:revLst>
+</p1510:revInfo>
+</file>
+
+<file path=ppt/changesInfos/changesInfo1.xml><?xml version="1.0" encoding="utf-8"?>
+<pc:chgInfo xmlns:a="http://schemas.openxmlformats.org/drawingml/2006/main" xmlns:r="http://schemas.openxmlformats.org/officeDocument/2006/relationships" xmlns:ac="http://schemas.microsoft.com/office/drawing/2013/main/command" xmlns:pc="http://schemas.microsoft.com/office/powerpoint/2013/main/command">
+  <pc:docChgLst>
+    <pc:chgData name="寺尾　彪翔" userId="S::fko2647029@stu.o-hara.ac.jp::aaed72af-aabf-466b-8760-91fcfb510bd3" providerId="AD" clId="Web-{00000000-0000-0000-0000-000000000000}"/>
+    <pc:docChg chg="modSld">
+      <pc:chgData name="寺尾　彪翔" userId="S::fko2647029@stu.o-hara.ac.jp::aaed72af-aabf-466b-8760-91fcfb510bd3" providerId="AD" clId="Web-{00000000-0000-0000-0000-000000000000}" dt="2026-10-08T21:13:47.015" v="45" actId="20577"/>
+      <pc:docMkLst>
+        <pc:docMk/>
+      </pc:docMkLst>
+      <pc:sldChg chg="modSp">
+        <pc:chgData name="寺尾　彪翔" userId="S::fko2647029@stu.o-hara.ac.jp::aaed72af-aabf-466b-8760-91fcfb510bd3" providerId="AD" clId="Web-{00000000-0000-0000-0000-000000000000}" dt="2026-10-08T21:13:47.015" v="45" actId="20577"/>
+        <pc:sldMkLst>
+          <pc:docMk/>
+          <pc:sldMk cId="3795403796" sldId="259"/>
+        </pc:sldMkLst>
+        <pc:spChg chg="mod">
+          <ac:chgData name="寺尾　彪翔" userId="S::fko2647029@stu.o-hara.ac.jp::aaed72af-aabf-466b-8760-91fcfb510bd3" providerId="AD" clId="Web-{00000000-0000-0000-0000-000000000000}" dt="2026-10-08T21:13:47.015" v="45" actId="20577"/>
+          <ac:spMkLst>
+            <pc:docMk/>
+            <pc:sldMk cId="3795403796" sldId="259"/>
+            <ac:spMk id="3" creationId="{A4889A58-1010-D491-4103-B01FDACBA81C}"/>
+          </ac:spMkLst>
+        </pc:spChg>
+      </pc:sldChg>
+    </pc:docChg>
+  </pc:docChgLst>
+</pc:chgInfo>
+</file>
+
 <file path=ppt/slideLayouts/slideLayout1.xml><?xml version="1.0" encoding="utf-8"?>
 <p:sldLayout xmlns:a="http://schemas.openxmlformats.org/drawingml/2006/main" xmlns:r="http://schemas.openxmlformats.org/officeDocument/2006/relationships" xmlns:p="http://schemas.openxmlformats.org/presentationml/2006/main" type="title" preserve="1">
   <p:cSld name="タイトル スライド">
@@ -263,7 +300,7 @@
           <a:p>
             <a:fld id="{2E7489E2-24D5-4E87-8DBE-89F167604D51}" type="datetimeFigureOut">
               <a:rPr kumimoji="1" lang="ja-JP" altLang="en-US" smtClean="0"/>
-              <a:t>2026/10/8</a:t>
+              <a:t>2026/10/9</a:t>
             </a:fld>
             <a:endParaRPr kumimoji="1" lang="ja-JP" altLang="en-US"/>
           </a:p>
@@ -493,7 +530,7 @@
           <a:p>
             <a:fld id="{2E7489E2-24D5-4E87-8DBE-89F167604D51}" type="datetimeFigureOut">
               <a:rPr kumimoji="1" lang="ja-JP" altLang="en-US" smtClean="0"/>
-              <a:t>2026/10/8</a:t>
+              <a:t>2026/10/9</a:t>
             </a:fld>
             <a:endParaRPr kumimoji="1" lang="ja-JP" altLang="en-US"/>
           </a:p>
@@ -733,7 +770,7 @@
           <a:p>
             <a:fld id="{2E7489E2-24D5-4E87-8DBE-89F167604D51}" type="datetimeFigureOut">
               <a:rPr kumimoji="1" lang="ja-JP" altLang="en-US" smtClean="0"/>
-              <a:t>2026/10/8</a:t>
+              <a:t>2026/10/9</a:t>
             </a:fld>
             <a:endParaRPr kumimoji="1" lang="ja-JP" altLang="en-US"/>
           </a:p>
@@ -963,7 +1000,7 @@
           <a:p>
             <a:fld id="{2E7489E2-24D5-4E87-8DBE-89F167604D51}" type="datetimeFigureOut">
               <a:rPr kumimoji="1" lang="ja-JP" altLang="en-US" smtClean="0"/>
-              <a:t>2026/10/8</a:t>
+              <a:t>2026/10/9</a:t>
             </a:fld>
             <a:endParaRPr kumimoji="1" lang="ja-JP" altLang="en-US"/>
           </a:p>
@@ -1238,7 +1275,7 @@
           <a:p>
             <a:fld id="{2E7489E2-24D5-4E87-8DBE-89F167604D51}" type="datetimeFigureOut">
               <a:rPr kumimoji="1" lang="ja-JP" altLang="en-US" smtClean="0"/>
-              <a:t>2026/10/8</a:t>
+              <a:t>2026/10/9</a:t>
             </a:fld>
             <a:endParaRPr kumimoji="1" lang="ja-JP" altLang="en-US"/>
           </a:p>
@@ -1567,7 +1604,7 @@
           <a:p>
             <a:fld id="{2E7489E2-24D5-4E87-8DBE-89F167604D51}" type="datetimeFigureOut">
               <a:rPr kumimoji="1" lang="ja-JP" altLang="en-US" smtClean="0"/>
-              <a:t>2026/10/8</a:t>
+              <a:t>2026/10/9</a:t>
             </a:fld>
             <a:endParaRPr kumimoji="1" lang="ja-JP" altLang="en-US"/>
           </a:p>
@@ -2043,7 +2080,7 @@
           <a:p>
             <a:fld id="{2E7489E2-24D5-4E87-8DBE-89F167604D51}" type="datetimeFigureOut">
               <a:rPr kumimoji="1" lang="ja-JP" altLang="en-US" smtClean="0"/>
-              <a:t>2026/10/8</a:t>
+              <a:t>2026/10/9</a:t>
             </a:fld>
             <a:endParaRPr kumimoji="1" lang="ja-JP" altLang="en-US"/>
           </a:p>
@@ -2184,7 +2221,7 @@
           <a:p>
             <a:fld id="{2E7489E2-24D5-4E87-8DBE-89F167604D51}" type="datetimeFigureOut">
               <a:rPr kumimoji="1" lang="ja-JP" altLang="en-US" smtClean="0"/>
-              <a:t>2026/10/8</a:t>
+              <a:t>2026/10/9</a:t>
             </a:fld>
             <a:endParaRPr kumimoji="1" lang="ja-JP" altLang="en-US"/>
           </a:p>
@@ -2297,7 +2334,7 @@
           <a:p>
             <a:fld id="{2E7489E2-24D5-4E87-8DBE-89F167604D51}" type="datetimeFigureOut">
               <a:rPr kumimoji="1" lang="ja-JP" altLang="en-US" smtClean="0"/>
-              <a:t>2026/10/8</a:t>
+              <a:t>2026/10/9</a:t>
             </a:fld>
             <a:endParaRPr kumimoji="1" lang="ja-JP" altLang="en-US"/>
           </a:p>
@@ -2640,7 +2677,7 @@
           <a:p>
             <a:fld id="{2E7489E2-24D5-4E87-8DBE-89F167604D51}" type="datetimeFigureOut">
               <a:rPr kumimoji="1" lang="ja-JP" altLang="en-US" smtClean="0"/>
-              <a:t>2026/10/8</a:t>
+              <a:t>2026/10/9</a:t>
             </a:fld>
             <a:endParaRPr kumimoji="1" lang="ja-JP" altLang="en-US"/>
           </a:p>
@@ -2928,7 +2965,7 @@
           <a:p>
             <a:fld id="{2E7489E2-24D5-4E87-8DBE-89F167604D51}" type="datetimeFigureOut">
               <a:rPr kumimoji="1" lang="ja-JP" altLang="en-US" smtClean="0"/>
-              <a:t>2026/10/8</a:t>
+              <a:t>2026/10/9</a:t>
             </a:fld>
             <a:endParaRPr kumimoji="1" lang="ja-JP" altLang="en-US"/>
           </a:p>
@@ -3201,7 +3238,7 @@
           <a:p>
             <a:fld id="{2E7489E2-24D5-4E87-8DBE-89F167604D51}" type="datetimeFigureOut">
               <a:rPr kumimoji="1" lang="ja-JP" altLang="en-US" smtClean="0"/>
-              <a:t>2026/10/8</a:t>
+              <a:t>2026/10/9</a:t>
             </a:fld>
             <a:endParaRPr kumimoji="1" lang="ja-JP" altLang="en-US"/>
           </a:p>
@@ -4686,33 +4723,77 @@
         <p:spPr>
           <a:xfrm>
             <a:off x="379269" y="1229303"/>
-            <a:ext cx="6548004" cy="4201680"/>
+            <a:ext cx="6548004" cy="4638560"/>
           </a:xfrm>
         </p:spPr>
         <p:txBody>
-          <a:bodyPr>
+          <a:bodyPr vert="horz" lIns="91440" tIns="45720" rIns="91440" bIns="45720" rtlCol="0" anchor="t">
             <a:normAutofit/>
           </a:bodyPr>
           <a:lstStyle/>
           <a:p>
             <a:r>
+              <a:rPr lang="ja-JP" altLang="en-US" dirty="0">
+                <a:ea typeface="游ゴシック"/>
+              </a:rPr>
+              <a:t>パッドかキーボード</a:t>
+            </a:r>
+            <a:r>
+              <a:rPr lang="en-US" altLang="ja-JP" dirty="0">
+                <a:ea typeface="游ゴシック"/>
+              </a:rPr>
+              <a:t>&amp;</a:t>
+            </a:r>
+            <a:r>
+              <a:rPr lang="ja-JP" altLang="en-US" dirty="0">
+                <a:ea typeface="游ゴシック"/>
+              </a:rPr>
+              <a:t>マウスで操作</a:t>
+            </a:r>
+            <a:endParaRPr lang="en-US" altLang="ja-JP" dirty="0">
+              <a:ea typeface="游ゴシック"/>
+            </a:endParaRPr>
+          </a:p>
+          <a:p>
+            <a:r>
+              <a:rPr lang="ja-JP" altLang="en-US" dirty="0">
+                <a:ea typeface="游ゴシック"/>
+              </a:rPr>
+              <a:t>ゲームスタートしたらロビー</a:t>
+            </a:r>
+            <a:r>
+              <a:rPr lang="en-US" altLang="ja-JP" dirty="0">
+                <a:ea typeface="游ゴシック"/>
+              </a:rPr>
+              <a:t>(</a:t>
+            </a:r>
+            <a:r>
+              <a:rPr lang="ja-JP" altLang="en-US" dirty="0">
+                <a:ea typeface="游ゴシック"/>
+              </a:rPr>
+              <a:t>初期地点</a:t>
+            </a:r>
+            <a:r>
+              <a:rPr lang="en-US" altLang="ja-JP" dirty="0">
+                <a:ea typeface="游ゴシック"/>
+              </a:rPr>
+              <a:t>)</a:t>
+            </a:r>
+            <a:r>
+              <a:rPr lang="ja-JP" altLang="en-US" dirty="0">
+                <a:ea typeface="游ゴシック"/>
+              </a:rPr>
+              <a:t>からスポーンする</a:t>
+            </a:r>
+            <a:endParaRPr lang="en-US" altLang="ja-JP" dirty="0">
+              <a:ea typeface="游ゴシック"/>
+            </a:endParaRPr>
+          </a:p>
+          <a:p>
+            <a:pPr algn="just"/>
+            <a:r>
               <a:rPr lang="ja-JP" altLang="en-US" dirty="0"/>
-              <a:t>パッドかキーボード</a:t>
-            </a:r>
-            <a:r>
-              <a:rPr lang="en-US" altLang="ja-JP" dirty="0"/>
-              <a:t>&amp;</a:t>
-            </a:r>
-            <a:r>
-              <a:rPr lang="ja-JP" altLang="en-US" dirty="0"/>
-              <a:t>マウスで操作</a:t>
-            </a:r>
-            <a:endParaRPr lang="en-US" altLang="ja-JP" dirty="0"/>
-          </a:p>
-          <a:p>
-            <a:r>
-              <a:rPr lang="ja-JP" altLang="en-US" dirty="0"/>
-              <a:t>ゲームスタートしたらロビー</a:t>
+              <a:t>鍵のかけらを集めて脱出する</a:t>
             </a:r>
             <a:r>
               <a:rPr lang="en-US" altLang="ja-JP" dirty="0"/>
@@ -4720,58 +4801,59 @@
             </a:r>
             <a:r>
               <a:rPr lang="ja-JP" altLang="en-US" dirty="0"/>
-              <a:t>初期地点</a:t>
+              <a:t>かけらを全部集めるとロビーが脱出口になって脱出可能になる</a:t>
             </a:r>
             <a:r>
               <a:rPr lang="en-US" altLang="ja-JP" dirty="0"/>
               <a:t>)</a:t>
             </a:r>
-            <a:r>
-              <a:rPr lang="ja-JP" altLang="en-US" dirty="0"/>
-              <a:t>からスポーンする</a:t>
-            </a:r>
-            <a:endParaRPr lang="en-US" altLang="ja-JP" dirty="0"/>
-          </a:p>
-          <a:p>
-            <a:pPr algn="just"/>
-            <a:r>
-              <a:rPr lang="ja-JP" altLang="en-US" dirty="0"/>
-              <a:t>鍵のかけらを集めて脱出する</a:t>
-            </a:r>
-            <a:r>
-              <a:rPr lang="en-US" altLang="ja-JP" dirty="0"/>
-              <a:t>(</a:t>
-            </a:r>
-            <a:r>
-              <a:rPr lang="ja-JP" altLang="en-US" dirty="0"/>
-              <a:t>かけらを全部集めるとロビーが脱出口になって脱出可能になる</a:t>
-            </a:r>
-            <a:r>
-              <a:rPr lang="en-US" altLang="ja-JP" dirty="0"/>
-              <a:t>)</a:t>
-            </a:r>
-          </a:p>
-          <a:p>
-            <a:r>
-              <a:rPr lang="ja-JP" altLang="en-US" dirty="0"/>
+          </a:p>
+          <a:p>
+            <a:r>
+              <a:rPr lang="ja-JP" altLang="en-US" dirty="0">
+                <a:ea typeface="游ゴシック"/>
+              </a:rPr>
               <a:t>かけら数と残機数は常に画面内に表示</a:t>
             </a:r>
-            <a:endParaRPr lang="en-US" altLang="ja-JP" dirty="0"/>
-          </a:p>
-          <a:p>
-            <a:r>
-              <a:rPr lang="ja-JP" altLang="en-US" dirty="0"/>
-              <a:t>残機が</a:t>
-            </a:r>
-            <a:r>
-              <a:rPr lang="en-US" altLang="ja-JP" dirty="0"/>
+            <a:endParaRPr lang="en-US" altLang="ja-JP" dirty="0">
+              <a:ea typeface="游ゴシック" panose="020B0400000000000000" pitchFamily="34" charset="-128"/>
+            </a:endParaRPr>
+          </a:p>
+          <a:p>
+            <a:r>
+              <a:rPr lang="ja-JP" altLang="en-US" dirty="0">
+                <a:ea typeface="游ゴシック"/>
+              </a:rPr>
+              <a:t>2回復活可能で残機が</a:t>
+            </a:r>
+            <a:r>
+              <a:rPr lang="en-US" altLang="ja-JP" dirty="0">
+                <a:ea typeface="游ゴシック"/>
+              </a:rPr>
               <a:t>0</a:t>
             </a:r>
             <a:r>
-              <a:rPr lang="ja-JP" altLang="en-US" dirty="0"/>
-              <a:t>になるとゲームオーバー</a:t>
-            </a:r>
-            <a:endParaRPr lang="en-US" altLang="ja-JP" dirty="0"/>
+              <a:rPr lang="ja-JP" altLang="en-US" dirty="0">
+                <a:ea typeface="游ゴシック"/>
+              </a:rPr>
+              <a:t>になるとゲームオーバー(残機最大３)</a:t>
+            </a:r>
+            <a:endParaRPr lang="en-US" altLang="ja-JP" dirty="0">
+              <a:ea typeface="游ゴシック"/>
+            </a:endParaRPr>
+          </a:p>
+          <a:p>
+            <a:r>
+              <a:rPr lang="ja-JP" altLang="en-US" dirty="0">
+                <a:ea typeface="游ゴシック"/>
+              </a:rPr>
+              <a:t>ステージは1ステージのみ</a:t>
+            </a:r>
+          </a:p>
+          <a:p>
+            <a:endParaRPr lang="ja-JP" altLang="en-US" dirty="0">
+              <a:ea typeface="游ゴシック"/>
+            </a:endParaRPr>
           </a:p>
         </p:txBody>
       </p:sp>
@@ -5144,7 +5226,7 @@
           <a:p>
             <a:r>
               <a:rPr lang="ja-JP" altLang="en-US" dirty="0"/>
-              <a:t>敵につかまるとロビーに戻されて残機が減りかけら数が引き継がれる</a:t>
+              <a:t>敵につかまるとリスポーン地点に戻されて残機が減りかけら数が引き継がれる</a:t>
             </a:r>
             <a:endParaRPr kumimoji="1" lang="ja-JP" altLang="en-US" dirty="0"/>
           </a:p>
@@ -5512,4 +5594,249 @@
     </a:ext>
   </a:extLst>
 </a:theme>
+</file>
+
+<file path=customXml/item1.xml><?xml version="1.0" encoding="utf-8"?>
+<p:properties xmlns:p="http://schemas.microsoft.com/office/2006/metadata/properties" xmlns:xsi="http://www.w3.org/2001/XMLSchema-instance" xmlns:pc="http://schemas.microsoft.com/office/infopath/2007/PartnerControls">
+  <documentManagement>
+    <TaxCatchAll xmlns="13f615a4-e0af-482f-88d9-ff00ebe3dfe3" xsi:nil="true"/>
+    <lcf76f155ced4ddcb4097134ff3c332f xmlns="a1b59e43-737b-4836-9005-c337a78d8d8d">
+      <Terms xmlns="http://schemas.microsoft.com/office/infopath/2007/PartnerControls"/>
+    </lcf76f155ced4ddcb4097134ff3c332f>
+  </documentManagement>
+</p:properties>
+</file>
+
+<file path=customXml/item2.xml><?xml version="1.0" encoding="utf-8"?>
+<?mso-contentType ?>
+<FormTemplates xmlns="http://schemas.microsoft.com/sharepoint/v3/contenttype/forms">
+  <Display>DocumentLibraryForm</Display>
+  <Edit>DocumentLibraryForm</Edit>
+  <New>DocumentLibraryForm</New>
+</FormTemplates>
+</file>
+
+<file path=customXml/item3.xml><?xml version="1.0" encoding="utf-8"?>
+<ct:contentTypeSchema xmlns:ct="http://schemas.microsoft.com/office/2006/metadata/contentType" xmlns:ma="http://schemas.microsoft.com/office/2006/metadata/properties/metaAttributes" ct:_="" ma:_="" ma:contentTypeName="ドキュメント" ma:contentTypeID="0x01010088DD2ABCBA046B4FB6B4979C53FCD54A" ma:contentTypeVersion="10" ma:contentTypeDescription="新しいドキュメントを作成します。" ma:contentTypeScope="" ma:versionID="55e278bfb0d024e9478a3b5ddc2de6a8">
+  <xsd:schema xmlns:xsd="http://www.w3.org/2001/XMLSchema" xmlns:xs="http://www.w3.org/2001/XMLSchema" xmlns:p="http://schemas.microsoft.com/office/2006/metadata/properties" xmlns:ns2="a1b59e43-737b-4836-9005-c337a78d8d8d" xmlns:ns3="13f615a4-e0af-482f-88d9-ff00ebe3dfe3" targetNamespace="http://schemas.microsoft.com/office/2006/metadata/properties" ma:root="true" ma:fieldsID="146078834fa44e5df85462deb825ca0e" ns2:_="" ns3:_="">
+    <xsd:import namespace="a1b59e43-737b-4836-9005-c337a78d8d8d"/>
+    <xsd:import namespace="13f615a4-e0af-482f-88d9-ff00ebe3dfe3"/>
+    <xsd:element name="properties">
+      <xsd:complexType>
+        <xsd:sequence>
+          <xsd:element name="documentManagement">
+            <xsd:complexType>
+              <xsd:all>
+                <xsd:element ref="ns2:MediaServiceMetadata" minOccurs="0"/>
+                <xsd:element ref="ns2:MediaServiceFastMetadata" minOccurs="0"/>
+                <xsd:element ref="ns2:MediaServiceSearchProperties" minOccurs="0"/>
+                <xsd:element ref="ns2:MediaServiceDateTaken" minOccurs="0"/>
+                <xsd:element ref="ns2:lcf76f155ced4ddcb4097134ff3c332f" minOccurs="0"/>
+                <xsd:element ref="ns3:TaxCatchAll" minOccurs="0"/>
+                <xsd:element ref="ns2:MediaServiceGenerationTime" minOccurs="0"/>
+                <xsd:element ref="ns2:MediaServiceEventHashCode" minOccurs="0"/>
+                <xsd:element ref="ns2:MediaLengthInSeconds" minOccurs="0"/>
+              </xsd:all>
+            </xsd:complexType>
+          </xsd:element>
+        </xsd:sequence>
+      </xsd:complexType>
+    </xsd:element>
+  </xsd:schema>
+  <xsd:schema xmlns:xsd="http://www.w3.org/2001/XMLSchema" xmlns:xs="http://www.w3.org/2001/XMLSchema" xmlns:dms="http://schemas.microsoft.com/office/2006/documentManagement/types" xmlns:pc="http://schemas.microsoft.com/office/infopath/2007/PartnerControls" targetNamespace="a1b59e43-737b-4836-9005-c337a78d8d8d" elementFormDefault="qualified">
+    <xsd:import namespace="http://schemas.microsoft.com/office/2006/documentManagement/types"/>
+    <xsd:import namespace="http://schemas.microsoft.com/office/infopath/2007/PartnerControls"/>
+    <xsd:element name="MediaServiceMetadata" ma:index="8" nillable="true" ma:displayName="MediaServiceMetadata" ma:hidden="true" ma:internalName="MediaServiceMetadata" ma:readOnly="true">
+      <xsd:simpleType>
+        <xsd:restriction base="dms:Note"/>
+      </xsd:simpleType>
+    </xsd:element>
+    <xsd:element name="MediaServiceFastMetadata" ma:index="9" nillable="true" ma:displayName="MediaServiceFastMetadata" ma:hidden="true" ma:internalName="MediaServiceFastMetadata" ma:readOnly="true">
+      <xsd:simpleType>
+        <xsd:restriction base="dms:Note"/>
+      </xsd:simpleType>
+    </xsd:element>
+    <xsd:element name="MediaServiceSearchProperties" ma:index="10" nillable="true" ma:displayName="MediaServiceSearchProperties" ma:hidden="true" ma:internalName="MediaServiceSearchProperties" ma:readOnly="true">
+      <xsd:simpleType>
+        <xsd:restriction base="dms:Note"/>
+      </xsd:simpleType>
+    </xsd:element>
+    <xsd:element name="MediaServiceDateTaken" ma:index="11" nillable="true" ma:displayName="MediaServiceDateTaken" ma:hidden="true" ma:indexed="true" ma:internalName="MediaServiceDateTaken" ma:readOnly="true">
+      <xsd:simpleType>
+        <xsd:restriction base="dms:Text"/>
+      </xsd:simpleType>
+    </xsd:element>
+    <xsd:element name="lcf76f155ced4ddcb4097134ff3c332f" ma:index="13" nillable="true" ma:taxonomy="true" ma:internalName="lcf76f155ced4ddcb4097134ff3c332f" ma:taxonomyFieldName="MediaServiceImageTags" ma:displayName="画像タグ" ma:readOnly="false" ma:fieldId="{5cf76f15-5ced-4ddc-b409-7134ff3c332f}" ma:taxonomyMulti="true" ma:sspId="c7b788f1-635f-435b-a825-11a9aec0b64e" ma:termSetId="09814cd3-568e-fe90-9814-8d621ff8fb84" ma:anchorId="fba54fb3-c3e1-fe81-a776-ca4b69148c4d" ma:open="true" ma:isKeyword="false">
+      <xsd:complexType>
+        <xsd:sequence>
+          <xsd:element ref="pc:Terms" minOccurs="0" maxOccurs="1"/>
+        </xsd:sequence>
+      </xsd:complexType>
+    </xsd:element>
+    <xsd:element name="MediaServiceGenerationTime" ma:index="15" nillable="true" ma:displayName="MediaServiceGenerationTime" ma:hidden="true" ma:internalName="MediaServiceGenerationTime" ma:readOnly="true">
+      <xsd:simpleType>
+        <xsd:restriction base="dms:Text"/>
+      </xsd:simpleType>
+    </xsd:element>
+    <xsd:element name="MediaServiceEventHashCode" ma:index="16" nillable="true" ma:displayName="MediaServiceEventHashCode" ma:hidden="true" ma:internalName="MediaServiceEventHashCode" ma:readOnly="true">
+      <xsd:simpleType>
+        <xsd:restriction base="dms:Text"/>
+      </xsd:simpleType>
+    </xsd:element>
+    <xsd:element name="MediaLengthInSeconds" ma:index="17" nillable="true" ma:displayName="MediaLengthInSeconds" ma:hidden="true" ma:internalName="MediaLengthInSeconds" ma:readOnly="true">
+      <xsd:simpleType>
+        <xsd:restriction base="dms:Unknown"/>
+      </xsd:simpleType>
+    </xsd:element>
+  </xsd:schema>
+  <xsd:schema xmlns:xsd="http://www.w3.org/2001/XMLSchema" xmlns:xs="http://www.w3.org/2001/XMLSchema" xmlns:dms="http://schemas.microsoft.com/office/2006/documentManagement/types" xmlns:pc="http://schemas.microsoft.com/office/infopath/2007/PartnerControls" targetNamespace="13f615a4-e0af-482f-88d9-ff00ebe3dfe3" elementFormDefault="qualified">
+    <xsd:import namespace="http://schemas.microsoft.com/office/2006/documentManagement/types"/>
+    <xsd:import namespace="http://schemas.microsoft.com/office/infopath/2007/PartnerControls"/>
+    <xsd:element name="TaxCatchAll" ma:index="14" nillable="true" ma:displayName="Taxonomy Catch All Column" ma:hidden="true" ma:list="{e1f9c6f8-68dd-4210-82b3-990de1acf2ea}" ma:internalName="TaxCatchAll" ma:showField="CatchAllData" ma:web="13f615a4-e0af-482f-88d9-ff00ebe3dfe3">
+      <xsd:complexType>
+        <xsd:complexContent>
+          <xsd:extension base="dms:MultiChoiceLookup">
+            <xsd:sequence>
+              <xsd:element name="Value" type="dms:Lookup" maxOccurs="unbounded" minOccurs="0" nillable="true"/>
+            </xsd:sequence>
+          </xsd:extension>
+        </xsd:complexContent>
+      </xsd:complexType>
+    </xsd:element>
+  </xsd:schema>
+  <xsd:schema xmlns="http://schemas.openxmlformats.org/package/2006/metadata/core-properties" xmlns:xsd="http://www.w3.org/2001/XMLSchema" xmlns:xsi="http://www.w3.org/2001/XMLSchema-instance" xmlns:dc="http://purl.org/dc/elements/1.1/" xmlns:dcterms="http://purl.org/dc/terms/" xmlns:odoc="http://schemas.microsoft.com/internal/obd" targetNamespace="http://schemas.openxmlformats.org/package/2006/metadata/core-properties" elementFormDefault="qualified" attributeFormDefault="unqualified" blockDefault="#all">
+    <xsd:import namespace="http://purl.org/dc/elements/1.1/" schemaLocation="http://dublincore.org/schemas/xmls/qdc/2003/04/02/dc.xsd"/>
+    <xsd:import namespace="http://purl.org/dc/terms/" schemaLocation="http://dublincore.org/schemas/xmls/qdc/2003/04/02/dcterms.xsd"/>
+    <xsd:element name="coreProperties" type="CT_coreProperties"/>
+    <xsd:complexType name="CT_coreProperties">
+      <xsd:all>
+        <xsd:element ref="dc:creator" minOccurs="0" maxOccurs="1"/>
+        <xsd:element ref="dcterms:created" minOccurs="0" maxOccurs="1"/>
+        <xsd:element ref="dc:identifier" minOccurs="0" maxOccurs="1"/>
+        <xsd:element name="contentType" minOccurs="0" maxOccurs="1" type="xsd:string" ma:index="0" ma:displayName="コンテンツ タイプ"/>
+        <xsd:element ref="dc:title" minOccurs="0" maxOccurs="1" ma:index="4" ma:displayName="タイトル"/>
+        <xsd:element ref="dc:subject" minOccurs="0" maxOccurs="1"/>
+        <xsd:element ref="dc:description" minOccurs="0" maxOccurs="1"/>
+        <xsd:element name="keywords" minOccurs="0" maxOccurs="1" type="xsd:string"/>
+        <xsd:element ref="dc:language" minOccurs="0" maxOccurs="1"/>
+        <xsd:element name="category" minOccurs="0" maxOccurs="1" type="xsd:string"/>
+        <xsd:element name="version" minOccurs="0" maxOccurs="1" type="xsd:string"/>
+        <xsd:element name="revision" minOccurs="0" maxOccurs="1" type="xsd:string">
+          <xsd:annotation>
+            <xsd:documentation>
+                        This value indicates the number of saves or revisions. The application is responsible for updating this value after each revision.
+                    </xsd:documentation>
+          </xsd:annotation>
+        </xsd:element>
+        <xsd:element name="lastModifiedBy" minOccurs="0" maxOccurs="1" type="xsd:string"/>
+        <xsd:element ref="dcterms:modified" minOccurs="0" maxOccurs="1"/>
+        <xsd:element name="contentStatus" minOccurs="0" maxOccurs="1" type="xsd:string"/>
+      </xsd:all>
+    </xsd:complexType>
+  </xsd:schema>
+  <xs:schema xmlns:pc="http://schemas.microsoft.com/office/infopath/2007/PartnerControls" xmlns:xs="http://www.w3.org/2001/XMLSchema" targetNamespace="http://schemas.microsoft.com/office/infopath/2007/PartnerControls" elementFormDefault="qualified" attributeFormDefault="unqualified">
+    <xs:element name="Person">
+      <xs:complexType>
+        <xs:sequence>
+          <xs:element ref="pc:DisplayName" minOccurs="0"/>
+          <xs:element ref="pc:AccountId" minOccurs="0"/>
+          <xs:element ref="pc:AccountType" minOccurs="0"/>
+        </xs:sequence>
+      </xs:complexType>
+    </xs:element>
+    <xs:element name="DisplayName" type="xs:string"/>
+    <xs:element name="AccountId" type="xs:string"/>
+    <xs:element name="AccountType" type="xs:string"/>
+    <xs:element name="BDCAssociatedEntity">
+      <xs:complexType>
+        <xs:sequence>
+          <xs:element ref="pc:BDCEntity" minOccurs="0" maxOccurs="unbounded"/>
+        </xs:sequence>
+        <xs:attribute ref="pc:EntityNamespace"/>
+        <xs:attribute ref="pc:EntityName"/>
+        <xs:attribute ref="pc:SystemInstanceName"/>
+        <xs:attribute ref="pc:AssociationName"/>
+      </xs:complexType>
+    </xs:element>
+    <xs:attribute name="EntityNamespace" type="xs:string"/>
+    <xs:attribute name="EntityName" type="xs:string"/>
+    <xs:attribute name="SystemInstanceName" type="xs:string"/>
+    <xs:attribute name="AssociationName" type="xs:string"/>
+    <xs:element name="BDCEntity">
+      <xs:complexType>
+        <xs:sequence>
+          <xs:element ref="pc:EntityDisplayName" minOccurs="0"/>
+          <xs:element ref="pc:EntityInstanceReference" minOccurs="0"/>
+          <xs:element ref="pc:EntityId1" minOccurs="0"/>
+          <xs:element ref="pc:EntityId2" minOccurs="0"/>
+          <xs:element ref="pc:EntityId3" minOccurs="0"/>
+          <xs:element ref="pc:EntityId4" minOccurs="0"/>
+          <xs:element ref="pc:EntityId5" minOccurs="0"/>
+        </xs:sequence>
+      </xs:complexType>
+    </xs:element>
+    <xs:element name="EntityDisplayName" type="xs:string"/>
+    <xs:element name="EntityInstanceReference" type="xs:string"/>
+    <xs:element name="EntityId1" type="xs:string"/>
+    <xs:element name="EntityId2" type="xs:string"/>
+    <xs:element name="EntityId3" type="xs:string"/>
+    <xs:element name="EntityId4" type="xs:string"/>
+    <xs:element name="EntityId5" type="xs:string"/>
+    <xs:element name="Terms">
+      <xs:complexType>
+        <xs:sequence>
+          <xs:element ref="pc:TermInfo" minOccurs="0" maxOccurs="unbounded"/>
+        </xs:sequence>
+      </xs:complexType>
+    </xs:element>
+    <xs:element name="TermInfo">
+      <xs:complexType>
+        <xs:sequence>
+          <xs:element ref="pc:TermName" minOccurs="0"/>
+          <xs:element ref="pc:TermId" minOccurs="0"/>
+        </xs:sequence>
+      </xs:complexType>
+    </xs:element>
+    <xs:element name="TermName" type="xs:string"/>
+    <xs:element name="TermId" type="xs:string"/>
+  </xs:schema>
+</ct:contentTypeSchema>
+</file>
+
+<file path=customXml/itemProps1.xml><?xml version="1.0" encoding="utf-8"?>
+<ds:datastoreItem xmlns:ds="http://schemas.openxmlformats.org/officeDocument/2006/customXml" ds:itemID="{DEF9ACF0-AC8E-4853-9F8C-4123679968C8}">
+  <ds:schemaRefs>
+    <ds:schemaRef ds:uri="http://schemas.microsoft.com/office/2006/metadata/properties"/>
+    <ds:schemaRef ds:uri="http://schemas.microsoft.com/office/infopath/2007/PartnerControls"/>
+    <ds:schemaRef ds:uri="13f615a4-e0af-482f-88d9-ff00ebe3dfe3"/>
+    <ds:schemaRef ds:uri="a1b59e43-737b-4836-9005-c337a78d8d8d"/>
+  </ds:schemaRefs>
+</ds:datastoreItem>
+</file>
+
+<file path=customXml/itemProps2.xml><?xml version="1.0" encoding="utf-8"?>
+<ds:datastoreItem xmlns:ds="http://schemas.openxmlformats.org/officeDocument/2006/customXml" ds:itemID="{E6D8819D-FE3B-44A4-B552-24E993EFD97D}">
+  <ds:schemaRefs>
+    <ds:schemaRef ds:uri="http://schemas.microsoft.com/sharepoint/v3/contenttype/forms"/>
+  </ds:schemaRefs>
+</ds:datastoreItem>
+</file>
+
+<file path=customXml/itemProps3.xml><?xml version="1.0" encoding="utf-8"?>
+<ds:datastoreItem xmlns:ds="http://schemas.openxmlformats.org/officeDocument/2006/customXml" ds:itemID="{39DC315E-027D-4F13-99A1-5CB1CA515648}">
+  <ds:schemaRefs>
+    <ds:schemaRef ds:uri="http://schemas.microsoft.com/office/2006/metadata/contentType"/>
+    <ds:schemaRef ds:uri="http://schemas.microsoft.com/office/2006/metadata/properties/metaAttributes"/>
+    <ds:schemaRef ds:uri="http://www.w3.org/2001/XMLSchema"/>
+    <ds:schemaRef ds:uri="http://schemas.microsoft.com/office/2006/metadata/properties"/>
+    <ds:schemaRef ds:uri="a1b59e43-737b-4836-9005-c337a78d8d8d"/>
+    <ds:schemaRef ds:uri="13f615a4-e0af-482f-88d9-ff00ebe3dfe3"/>
+    <ds:schemaRef ds:uri="http://schemas.microsoft.com/office/2006/documentManagement/types"/>
+    <ds:schemaRef ds:uri="http://schemas.microsoft.com/office/infopath/2007/PartnerControls"/>
+    <ds:schemaRef ds:uri="http://schemas.openxmlformats.org/package/2006/metadata/core-properties"/>
+    <ds:schemaRef ds:uri="http://purl.org/dc/elements/1.1/"/>
+    <ds:schemaRef ds:uri="http://purl.org/dc/terms/"/>
+    <ds:schemaRef ds:uri="http://schemas.microsoft.com/internal/obd"/>
+  </ds:schemaRefs>
+</ds:datastoreItem>
 </file>